--- a/docs/advisory_slide.pptx
+++ b/docs/advisory_slide.pptx
@@ -510,6 +510,8 @@
 873 labelled clips across eight phrases (yeah, okay, right, sure, great, fine, really, come on), 753 episodes, 32 shows. Naturalistic political podcast audio rather than acted emotion corpora. Stance and arousal were labelled on independent axes so the arousal confound could be tested directly.
 HUMAN PREMISE CHECK, RUN BEFORE ANY MODELLING
 Two auxiliary annotators judged a counterbalanced 60-clip subset. Audio plus transcript reached 0.73 accuracy against 0.65 for transcript with discourse context, on a three-way chance of 0.33. So the contrast is partly text-recoverable but audio adds a real increment.
+WHAT COUNTS AS CHANCE
+Macro-F1 has no fixed chance value. A majority-class predictor scores only 0.196 here because macro-F1 gives zero to the two classes it never predicts, but our probe uses balanced class weights and spreads predictions across all three, so that is not its no-skill counterpart. The reference on the chart is the empirical permutation null, the same probe refit on shuffled labels, which sits near 0.33. Uniform and prior-matched random guessing give 0.322 and 0.333, agreeing closely. Against that line the continuous encoders are far above, while Mimi at 0.352 clears it only narrowly, though its own null never exceeded 0.330 in 60 runs, so the result remains significant.
 ROBUSTNESS
 Matched arousal. Stance is still decoded within each arousal level separately, so the probe is not simply reading loudness.
 Speaker held out. Grouping folds by show rather than episode moves WavLM only from 0.573 to 0.530, so it is not riding speaker identity.
@@ -1635,7 +1637,7 @@
         <p:spPr>
           <a:xfrm>
             <a:off x="6565392" y="1911096"/>
-            <a:ext cx="0" cy="2162556"/>
+            <a:ext cx="0" cy="1856232"/>
           </a:xfrm>
           <a:prstGeom prst="line">
             <a:avLst/>
@@ -1657,7 +1659,7 @@
         </p:nvSpPr>
         <p:spPr>
           <a:xfrm>
-            <a:off x="6336792" y="4101084"/>
+            <a:off x="6336792" y="3794760"/>
             <a:ext cx="457200" cy="201168"/>
           </a:xfrm>
           <a:prstGeom prst="rect">
@@ -1697,7 +1699,7 @@
         <p:spPr>
           <a:xfrm>
             <a:off x="7907495" y="1911096"/>
-            <a:ext cx="0" cy="2162556"/>
+            <a:ext cx="0" cy="1856232"/>
           </a:xfrm>
           <a:prstGeom prst="line">
             <a:avLst/>
@@ -1719,7 +1721,7 @@
         </p:nvSpPr>
         <p:spPr>
           <a:xfrm>
-            <a:off x="7678895" y="4101084"/>
+            <a:off x="7678895" y="3794760"/>
             <a:ext cx="457200" cy="201168"/>
           </a:xfrm>
           <a:prstGeom prst="rect">
@@ -1759,7 +1761,7 @@
         <p:spPr>
           <a:xfrm>
             <a:off x="9249598" y="1911096"/>
-            <a:ext cx="0" cy="2162556"/>
+            <a:ext cx="0" cy="1856232"/>
           </a:xfrm>
           <a:prstGeom prst="line">
             <a:avLst/>
@@ -1781,7 +1783,7 @@
         </p:nvSpPr>
         <p:spPr>
           <a:xfrm>
-            <a:off x="9020998" y="4101084"/>
+            <a:off x="9020998" y="3794760"/>
             <a:ext cx="457200" cy="201168"/>
           </a:xfrm>
           <a:prstGeom prst="rect">
@@ -1821,7 +1823,7 @@
         <p:spPr>
           <a:xfrm>
             <a:off x="10591702" y="1911096"/>
-            <a:ext cx="0" cy="2162556"/>
+            <a:ext cx="0" cy="1856232"/>
           </a:xfrm>
           <a:prstGeom prst="line">
             <a:avLst/>
@@ -1843,7 +1845,7 @@
         </p:nvSpPr>
         <p:spPr>
           <a:xfrm>
-            <a:off x="10363102" y="4101084"/>
+            <a:off x="10363102" y="3794760"/>
             <a:ext cx="457200" cy="201168"/>
           </a:xfrm>
           <a:prstGeom prst="rect">
@@ -1876,7 +1878,69 @@
       </p:sp>
       <p:sp>
         <p:nvSpPr>
-          <p:cNvPr id="29" name="Text 27"/>
+          <p:cNvPr id="29" name="Shape 27"/>
+          <p:cNvSpPr/>
+          <p:nvPr/>
+        </p:nvSpPr>
+        <p:spPr>
+          <a:xfrm>
+            <a:off x="8779862" y="1883664"/>
+            <a:ext cx="0" cy="1874520"/>
+          </a:xfrm>
+          <a:prstGeom prst="line">
+            <a:avLst/>
+          </a:prstGeom>
+          <a:noFill/>
+          <a:ln w="15875">
+            <a:solidFill>
+              <a:srgbClr val="B4522F"/>
+            </a:solidFill>
+            <a:prstDash val="dash"/>
+          </a:ln>
+        </p:spPr>
+      </p:sp>
+      <p:sp>
+        <p:nvSpPr>
+          <p:cNvPr id="30" name="Text 28"/>
+          <p:cNvSpPr/>
+          <p:nvPr/>
+        </p:nvSpPr>
+        <p:spPr>
+          <a:xfrm>
+            <a:off x="7819742" y="4014216"/>
+            <a:ext cx="1920240" cy="219456"/>
+          </a:xfrm>
+          <a:prstGeom prst="rect">
+            <a:avLst/>
+          </a:prstGeom>
+          <a:noFill/>
+          <a:ln/>
+        </p:spPr>
+        <p:txBody>
+          <a:bodyPr wrap="square" lIns="0" tIns="0" rIns="0" bIns="0" rtlCol="0" anchor="ctr"/>
+          <a:lstStyle/>
+          <a:p>
+            <a:pPr algn="ctr" indent="0" marL="0">
+              <a:buNone/>
+            </a:pPr>
+            <a:r>
+              <a:rPr lang="en-US" sz="900" i="1" dirty="0">
+                <a:solidFill>
+                  <a:srgbClr val="B4522F"/>
+                </a:solidFill>
+                <a:latin typeface="Calibri" pitchFamily="34" charset="0"/>
+                <a:ea typeface="Calibri" pitchFamily="34" charset="-122"/>
+                <a:cs typeface="Calibri" pitchFamily="34" charset="-120"/>
+              </a:rPr>
+              <a:t>chance, about 0.33</a:t>
+            </a:r>
+            <a:endParaRPr lang="en-US" sz="900" dirty="0"/>
+          </a:p>
+        </p:txBody>
+      </p:sp>
+      <p:sp>
+        <p:nvSpPr>
+          <p:cNvPr id="31" name="Text 29"/>
           <p:cNvSpPr/>
           <p:nvPr/>
         </p:nvSpPr>
@@ -1915,7 +1979,7 @@
       </p:sp>
       <p:sp>
         <p:nvSpPr>
-          <p:cNvPr id="30" name="Shape 28"/>
+          <p:cNvPr id="32" name="Shape 30"/>
           <p:cNvSpPr/>
           <p:nvPr/>
         </p:nvSpPr>
@@ -1940,7 +2004,7 @@
       </p:sp>
       <p:sp>
         <p:nvSpPr>
-          <p:cNvPr id="31" name="Text 29"/>
+          <p:cNvPr id="33" name="Text 31"/>
           <p:cNvSpPr/>
           <p:nvPr/>
         </p:nvSpPr>
@@ -1979,7 +2043,7 @@
       </p:sp>
       <p:sp>
         <p:nvSpPr>
-          <p:cNvPr id="32" name="Text 30"/>
+          <p:cNvPr id="34" name="Text 32"/>
           <p:cNvSpPr/>
           <p:nvPr/>
         </p:nvSpPr>
@@ -2018,7 +2082,7 @@
       </p:sp>
       <p:sp>
         <p:nvSpPr>
-          <p:cNvPr id="33" name="Shape 31"/>
+          <p:cNvPr id="35" name="Shape 33"/>
           <p:cNvSpPr/>
           <p:nvPr/>
         </p:nvSpPr>
@@ -2043,7 +2107,7 @@
       </p:sp>
       <p:sp>
         <p:nvSpPr>
-          <p:cNvPr id="34" name="Text 32"/>
+          <p:cNvPr id="36" name="Text 34"/>
           <p:cNvSpPr/>
           <p:nvPr/>
         </p:nvSpPr>
@@ -2082,7 +2146,7 @@
       </p:sp>
       <p:sp>
         <p:nvSpPr>
-          <p:cNvPr id="35" name="Text 33"/>
+          <p:cNvPr id="37" name="Text 35"/>
           <p:cNvSpPr/>
           <p:nvPr/>
         </p:nvSpPr>
@@ -2121,7 +2185,7 @@
       </p:sp>
       <p:sp>
         <p:nvSpPr>
-          <p:cNvPr id="36" name="Shape 34"/>
+          <p:cNvPr id="38" name="Shape 36"/>
           <p:cNvSpPr/>
           <p:nvPr/>
         </p:nvSpPr>
@@ -2146,7 +2210,7 @@
       </p:sp>
       <p:sp>
         <p:nvSpPr>
-          <p:cNvPr id="37" name="Text 35"/>
+          <p:cNvPr id="39" name="Text 37"/>
           <p:cNvSpPr/>
           <p:nvPr/>
         </p:nvSpPr>
@@ -2185,7 +2249,7 @@
       </p:sp>
       <p:sp>
         <p:nvSpPr>
-          <p:cNvPr id="38" name="Text 36"/>
+          <p:cNvPr id="40" name="Text 38"/>
           <p:cNvSpPr/>
           <p:nvPr/>
         </p:nvSpPr>
@@ -2224,7 +2288,7 @@
       </p:sp>
       <p:sp>
         <p:nvSpPr>
-          <p:cNvPr id="39" name="Shape 37"/>
+          <p:cNvPr id="41" name="Shape 39"/>
           <p:cNvSpPr/>
           <p:nvPr/>
         </p:nvSpPr>
@@ -2249,7 +2313,7 @@
       </p:sp>
       <p:sp>
         <p:nvSpPr>
-          <p:cNvPr id="40" name="Text 38"/>
+          <p:cNvPr id="42" name="Text 40"/>
           <p:cNvSpPr/>
           <p:nvPr/>
         </p:nvSpPr>
@@ -2288,7 +2352,7 @@
       </p:sp>
       <p:sp>
         <p:nvSpPr>
-          <p:cNvPr id="41" name="Text 39"/>
+          <p:cNvPr id="43" name="Text 41"/>
           <p:cNvSpPr/>
           <p:nvPr/>
         </p:nvSpPr>
@@ -2327,7 +2391,7 @@
       </p:sp>
       <p:sp>
         <p:nvSpPr>
-          <p:cNvPr id="42" name="Shape 40"/>
+          <p:cNvPr id="44" name="Shape 42"/>
           <p:cNvSpPr/>
           <p:nvPr/>
         </p:nvSpPr>
@@ -2352,7 +2416,7 @@
       </p:sp>
       <p:sp>
         <p:nvSpPr>
-          <p:cNvPr id="43" name="Text 41"/>
+          <p:cNvPr id="45" name="Text 43"/>
           <p:cNvSpPr/>
           <p:nvPr/>
         </p:nvSpPr>
@@ -2391,7 +2455,7 @@
       </p:sp>
       <p:sp>
         <p:nvSpPr>
-          <p:cNvPr id="44" name="Text 42"/>
+          <p:cNvPr id="46" name="Text 44"/>
           <p:cNvSpPr/>
           <p:nvPr/>
         </p:nvSpPr>
@@ -2430,7 +2494,7 @@
       </p:sp>
       <p:sp>
         <p:nvSpPr>
-          <p:cNvPr id="45" name="Shape 43"/>
+          <p:cNvPr id="47" name="Shape 45"/>
           <p:cNvSpPr/>
           <p:nvPr/>
         </p:nvSpPr>
@@ -2455,7 +2519,7 @@
       </p:sp>
       <p:sp>
         <p:nvSpPr>
-          <p:cNvPr id="46" name="Text 44"/>
+          <p:cNvPr id="48" name="Text 46"/>
           <p:cNvSpPr/>
           <p:nvPr/>
         </p:nvSpPr>
@@ -2494,110 +2558,7 @@
       </p:sp>
       <p:sp>
         <p:nvSpPr>
-          <p:cNvPr id="47" name="Text 45"/>
-          <p:cNvSpPr/>
-          <p:nvPr/>
-        </p:nvSpPr>
-        <p:spPr>
-          <a:xfrm>
-            <a:off x="4370832" y="3776472"/>
-            <a:ext cx="2103120" cy="251460"/>
-          </a:xfrm>
-          <a:prstGeom prst="rect">
-            <a:avLst/>
-          </a:prstGeom>
-          <a:noFill/>
-          <a:ln/>
-        </p:spPr>
-        <p:txBody>
-          <a:bodyPr wrap="square" lIns="0" tIns="0" rIns="0" bIns="0" rtlCol="0" anchor="ctr"/>
-          <a:lstStyle/>
-          <a:p>
-            <a:pPr algn="r" indent="0" marL="0">
-              <a:buNone/>
-            </a:pPr>
-            <a:r>
-              <a:rPr lang="en-US" sz="1050" dirty="0">
-                <a:solidFill>
-                  <a:srgbClr val="5C6773"/>
-                </a:solidFill>
-                <a:latin typeface="Calibri" pitchFamily="34" charset="0"/>
-                <a:ea typeface="Calibri" pitchFamily="34" charset="-122"/>
-                <a:cs typeface="Calibri" pitchFamily="34" charset="-120"/>
-              </a:rPr>
-              <a:t>No-skill baseline</a:t>
-            </a:r>
-            <a:endParaRPr lang="en-US" sz="1050" dirty="0"/>
-          </a:p>
-        </p:txBody>
-      </p:sp>
-      <p:sp>
-        <p:nvSpPr>
-          <p:cNvPr id="48" name="Shape 46"/>
-          <p:cNvSpPr/>
-          <p:nvPr/>
-        </p:nvSpPr>
-        <p:spPr>
-          <a:xfrm>
-            <a:off x="6565392" y="3794760"/>
-            <a:ext cx="1315261" cy="214884"/>
-          </a:xfrm>
-          <a:prstGeom prst="rect">
-            <a:avLst/>
-          </a:prstGeom>
-          <a:solidFill>
-            <a:srgbClr val="D5DAE0"/>
-          </a:solidFill>
-          <a:ln w="12700">
-            <a:solidFill>
-              <a:srgbClr val="333333"/>
-            </a:solidFill>
-            <a:prstDash val="solid"/>
-          </a:ln>
-        </p:spPr>
-      </p:sp>
-      <p:sp>
-        <p:nvSpPr>
-          <p:cNvPr id="49" name="Text 47"/>
-          <p:cNvSpPr/>
-          <p:nvPr/>
-        </p:nvSpPr>
-        <p:spPr>
-          <a:xfrm>
-            <a:off x="7953805" y="3776472"/>
-            <a:ext cx="777240" cy="251460"/>
-          </a:xfrm>
-          <a:prstGeom prst="rect">
-            <a:avLst/>
-          </a:prstGeom>
-          <a:noFill/>
-          <a:ln/>
-        </p:spPr>
-        <p:txBody>
-          <a:bodyPr wrap="square" lIns="0" tIns="0" rIns="0" bIns="0" rtlCol="0" anchor="ctr"/>
-          <a:lstStyle/>
-          <a:p>
-            <a:pPr indent="0" marL="0">
-              <a:buNone/>
-            </a:pPr>
-            <a:r>
-              <a:rPr lang="en-US" sz="1050" b="1" dirty="0">
-                <a:solidFill>
-                  <a:srgbClr val="131920"/>
-                </a:solidFill>
-                <a:latin typeface="Calibri" pitchFamily="34" charset="0"/>
-                <a:ea typeface="Calibri" pitchFamily="34" charset="-122"/>
-                <a:cs typeface="Calibri" pitchFamily="34" charset="-120"/>
-              </a:rPr>
-              <a:t>0.196</a:t>
-            </a:r>
-            <a:endParaRPr lang="en-US" sz="1050" dirty="0"/>
-          </a:p>
-        </p:txBody>
-      </p:sp>
-      <p:sp>
-        <p:nvSpPr>
-          <p:cNvPr id="50" name="Shape 48"/>
+          <p:cNvPr id="49" name="Shape 47"/>
           <p:cNvSpPr/>
           <p:nvPr/>
         </p:nvSpPr>
@@ -2624,7 +2585,7 @@
       </p:sp>
       <p:sp>
         <p:nvSpPr>
-          <p:cNvPr id="51" name="Text 49"/>
+          <p:cNvPr id="50" name="Text 48"/>
           <p:cNvSpPr/>
           <p:nvPr/>
         </p:nvSpPr>
@@ -2675,7 +2636,7 @@
                 <a:ea typeface="Calibri" pitchFamily="34" charset="-122"/>
                 <a:cs typeface="Calibri" pitchFamily="34" charset="-120"/>
               </a:rPr>
-              <a:t>Each bar is how accurately a simple classifier recovers the speaker's stance (affiliative, neutral or adversarial) from that representation alone, scored by macro-F1. Higher means more of the meaning survived. The pale bar is what a model with no real skill scores, so the distance above it is the signal.</a:t>
+              <a:t>Each bar is how accurately a simple classifier recovers the speaker's stance (affiliative, neutral or adversarial) from that representation alone, scored by macro-F1. Higher means more of the meaning survived. The dashed line is chance, the score the same probe reaches when the labels are shuffled, so the distance beyond it is the signal.</a:t>
             </a:r>
             <a:endParaRPr lang="en-US" sz="1050" dirty="0"/>
           </a:p>
@@ -2683,7 +2644,7 @@
       </p:sp>
       <p:sp>
         <p:nvSpPr>
-          <p:cNvPr id="52" name="Text 50"/>
+          <p:cNvPr id="51" name="Text 49"/>
           <p:cNvSpPr/>
           <p:nvPr/>
         </p:nvSpPr>
@@ -2736,7 +2697,7 @@
       </p:sp>
       <p:sp>
         <p:nvSpPr>
-          <p:cNvPr id="53" name="Shape 51"/>
+          <p:cNvPr id="52" name="Shape 50"/>
           <p:cNvSpPr/>
           <p:nvPr/>
         </p:nvSpPr>
@@ -2763,7 +2724,7 @@
       </p:sp>
       <p:sp>
         <p:nvSpPr>
-          <p:cNvPr id="54" name="Text 52"/>
+          <p:cNvPr id="53" name="Text 51"/>
           <p:cNvSpPr/>
           <p:nvPr/>
         </p:nvSpPr>
@@ -2808,7 +2769,7 @@
                 <a:ea typeface="Calibri" pitchFamily="34" charset="-122"/>
                 <a:cs typeface="Calibri" pitchFamily="34" charset="-120"/>
               </a:rPr>
-              <a:t>Continuous representations preserve pragmatic stance, and it holds at matched arousal and on speakers the probe never trained on. The discrete tokens deployed systems actually consume lose most of it, though not all.</a:t>
+              <a:t>Continuous representations preserve pragmatic stance, and it holds at matched arousal and on speakers the probe never trained on. The discrete tokens deployed systems actually consume sit barely above chance, retaining very little of it.</a:t>
             </a:r>
             <a:endParaRPr lang="en-US" sz="1200" dirty="0"/>
           </a:p>

--- a/docs/advisory_slide.pptx
+++ b/docs/advisory_slide.pptx
@@ -517,13 +517,13 @@
 Speaker held out. Grouping folds by show rather than episode moves WavLM only from 0.573 to 0.530, so it is not riding speaker identity.
 Non-independence. All scores are out of fold under GroupKFold by episode, with episode-cluster bootstrap intervals and 200-permutation tests. Every representation beats chance at p at most 0.01.
 WHERE THE CONTRAST LIVES
-WavLM peaks at layer 20 of 24 and falls away above it, consistent with upper layers shedding paralinguistics. Whisper plateaus across its top third. Inside Mimi the loss is not localised, since refinement codebooks 1 to 7 each score between 0.33 and 0.37 and stacking them adds nothing.
+WavLM peaks at layer 20 of 24 and falls away above it, consistent with upper layers shedding paralinguistics. Whisper plateaus across its top third. Inside Mimi, what little survives sits in codebook 0, the WavLM-distilled stream, at 0.402. The seven acoustic refinement codebooks are at or near chance. Chapter 2 predicted the opposite, so this is reported as a correction.
 CAVEATS TO RAISE
 Pooled target-only text sits above chance only because the eight phrases differ in stance base rate, which is why the within-word figure is the clean lexical control.
 Mimi is significantly above chance, so the honest claim is that default tokenisation loses most of the contrast, not all of it. The loss is recoverable with deliberate effort, but deployed systems use the defaults.
 The training-free contrast-preservation score points the same way but is underpowered at 191 decisions and sensitive to the distance metric, so it is reported as corroborating only.
 NEXT
-Probe Mimi codebook 0, the WavLM-distilled stream, which was not extracted in the first run. It is the one remaining untested possibility for where pragmatic information might survive inside the tokeniser.</a:t>
+Done. Codebook 0 is now extracted and probed. The headline Mimi figure is all 8 codebooks, the condition a deployed model actually consumes, at 0.381 against a chance of 0.311.</a:t>
             </a:r>
             <a:endParaRPr lang="en-US" dirty="0"/>
           </a:p>
@@ -2375,6 +2375,109 @@
               <a:buNone/>
             </a:pPr>
             <a:r>
+              <a:rPr lang="en-US" sz="1050" b="1" dirty="0">
+                <a:solidFill>
+                  <a:srgbClr val="B4522F"/>
+                </a:solidFill>
+                <a:latin typeface="Calibri" pitchFamily="34" charset="0"/>
+                <a:ea typeface="Calibri" pitchFamily="34" charset="-122"/>
+                <a:cs typeface="Calibri" pitchFamily="34" charset="-120"/>
+              </a:rPr>
+              <a:t>Mimi, deployed tokeniser</a:t>
+            </a:r>
+            <a:endParaRPr lang="en-US" sz="1050" dirty="0"/>
+          </a:p>
+        </p:txBody>
+      </p:sp>
+      <p:sp>
+        <p:nvSpPr>
+          <p:cNvPr id="44" name="Shape 42"/>
+          <p:cNvSpPr/>
+          <p:nvPr/>
+        </p:nvSpPr>
+        <p:spPr>
+          <a:xfrm>
+            <a:off x="6565392" y="3182112"/>
+            <a:ext cx="2556707" cy="214884"/>
+          </a:xfrm>
+          <a:prstGeom prst="rect">
+            <a:avLst/>
+          </a:prstGeom>
+          <a:solidFill>
+            <a:srgbClr val="B4522F"/>
+          </a:solidFill>
+          <a:ln w="12700">
+            <a:solidFill>
+              <a:srgbClr val="333333"/>
+            </a:solidFill>
+            <a:prstDash val="solid"/>
+          </a:ln>
+        </p:spPr>
+      </p:sp>
+      <p:sp>
+        <p:nvSpPr>
+          <p:cNvPr id="45" name="Text 43"/>
+          <p:cNvSpPr/>
+          <p:nvPr/>
+        </p:nvSpPr>
+        <p:spPr>
+          <a:xfrm>
+            <a:off x="9195251" y="3163824"/>
+            <a:ext cx="777240" cy="251460"/>
+          </a:xfrm>
+          <a:prstGeom prst="rect">
+            <a:avLst/>
+          </a:prstGeom>
+          <a:noFill/>
+          <a:ln/>
+        </p:spPr>
+        <p:txBody>
+          <a:bodyPr wrap="square" lIns="0" tIns="0" rIns="0" bIns="0" rtlCol="0" anchor="ctr"/>
+          <a:lstStyle/>
+          <a:p>
+            <a:pPr indent="0" marL="0">
+              <a:buNone/>
+            </a:pPr>
+            <a:r>
+              <a:rPr lang="en-US" sz="1050" b="1" dirty="0">
+                <a:solidFill>
+                  <a:srgbClr val="B4522F"/>
+                </a:solidFill>
+                <a:latin typeface="Calibri" pitchFamily="34" charset="0"/>
+                <a:ea typeface="Calibri" pitchFamily="34" charset="-122"/>
+                <a:cs typeface="Calibri" pitchFamily="34" charset="-120"/>
+              </a:rPr>
+              <a:t>0.381</a:t>
+            </a:r>
+            <a:endParaRPr lang="en-US" sz="1050" dirty="0"/>
+          </a:p>
+        </p:txBody>
+      </p:sp>
+      <p:sp>
+        <p:nvSpPr>
+          <p:cNvPr id="46" name="Text 44"/>
+          <p:cNvSpPr/>
+          <p:nvPr/>
+        </p:nvSpPr>
+        <p:spPr>
+          <a:xfrm>
+            <a:off x="4370832" y="3470148"/>
+            <a:ext cx="2103120" cy="251460"/>
+          </a:xfrm>
+          <a:prstGeom prst="rect">
+            <a:avLst/>
+          </a:prstGeom>
+          <a:noFill/>
+          <a:ln/>
+        </p:spPr>
+        <p:txBody>
+          <a:bodyPr wrap="square" lIns="0" tIns="0" rIns="0" bIns="0" rtlCol="0" anchor="ctr"/>
+          <a:lstStyle/>
+          <a:p>
+            <a:pPr algn="r" indent="0" marL="0">
+              <a:buNone/>
+            </a:pPr>
+            <a:r>
               <a:rPr lang="en-US" sz="1050" dirty="0">
                 <a:solidFill>
                   <a:srgbClr val="131920"/>
@@ -2391,13 +2494,13 @@
       </p:sp>
       <p:sp>
         <p:nvSpPr>
-          <p:cNvPr id="44" name="Shape 42"/>
-          <p:cNvSpPr/>
-          <p:nvPr/>
-        </p:nvSpPr>
-        <p:spPr>
-          <a:xfrm>
-            <a:off x="6565392" y="3182112"/>
+          <p:cNvPr id="47" name="Shape 45"/>
+          <p:cNvSpPr/>
+          <p:nvPr/>
+        </p:nvSpPr>
+        <p:spPr>
+          <a:xfrm>
+            <a:off x="6565392" y="3488436"/>
             <a:ext cx="2536575" cy="214884"/>
           </a:xfrm>
           <a:prstGeom prst="rect">
@@ -2416,13 +2519,13 @@
       </p:sp>
       <p:sp>
         <p:nvSpPr>
-          <p:cNvPr id="45" name="Text 43"/>
-          <p:cNvSpPr/>
-          <p:nvPr/>
-        </p:nvSpPr>
-        <p:spPr>
-          <a:xfrm>
-            <a:off x="9175119" y="3163824"/>
+          <p:cNvPr id="48" name="Text 46"/>
+          <p:cNvSpPr/>
+          <p:nvPr/>
+        </p:nvSpPr>
+        <p:spPr>
+          <a:xfrm>
+            <a:off x="9175119" y="3470148"/>
             <a:ext cx="777240" cy="251460"/>
           </a:xfrm>
           <a:prstGeom prst="rect">
@@ -2448,109 +2551,6 @@
                 <a:cs typeface="Calibri" pitchFamily="34" charset="-120"/>
               </a:rPr>
               <a:t>0.378</a:t>
-            </a:r>
-            <a:endParaRPr lang="en-US" sz="1050" dirty="0"/>
-          </a:p>
-        </p:txBody>
-      </p:sp>
-      <p:sp>
-        <p:nvSpPr>
-          <p:cNvPr id="46" name="Text 44"/>
-          <p:cNvSpPr/>
-          <p:nvPr/>
-        </p:nvSpPr>
-        <p:spPr>
-          <a:xfrm>
-            <a:off x="4370832" y="3470148"/>
-            <a:ext cx="2103120" cy="251460"/>
-          </a:xfrm>
-          <a:prstGeom prst="rect">
-            <a:avLst/>
-          </a:prstGeom>
-          <a:noFill/>
-          <a:ln/>
-        </p:spPr>
-        <p:txBody>
-          <a:bodyPr wrap="square" lIns="0" tIns="0" rIns="0" bIns="0" rtlCol="0" anchor="ctr"/>
-          <a:lstStyle/>
-          <a:p>
-            <a:pPr algn="r" indent="0" marL="0">
-              <a:buNone/>
-            </a:pPr>
-            <a:r>
-              <a:rPr lang="en-US" sz="1050" b="1" dirty="0">
-                <a:solidFill>
-                  <a:srgbClr val="B4522F"/>
-                </a:solidFill>
-                <a:latin typeface="Calibri" pitchFamily="34" charset="0"/>
-                <a:ea typeface="Calibri" pitchFamily="34" charset="-122"/>
-                <a:cs typeface="Calibri" pitchFamily="34" charset="-120"/>
-              </a:rPr>
-              <a:t>Mimi, deployed tokeniser</a:t>
-            </a:r>
-            <a:endParaRPr lang="en-US" sz="1050" dirty="0"/>
-          </a:p>
-        </p:txBody>
-      </p:sp>
-      <p:sp>
-        <p:nvSpPr>
-          <p:cNvPr id="47" name="Shape 45"/>
-          <p:cNvSpPr/>
-          <p:nvPr/>
-        </p:nvSpPr>
-        <p:spPr>
-          <a:xfrm>
-            <a:off x="6565392" y="3488436"/>
-            <a:ext cx="2362102" cy="214884"/>
-          </a:xfrm>
-          <a:prstGeom prst="rect">
-            <a:avLst/>
-          </a:prstGeom>
-          <a:solidFill>
-            <a:srgbClr val="B4522F"/>
-          </a:solidFill>
-          <a:ln w="12700">
-            <a:solidFill>
-              <a:srgbClr val="333333"/>
-            </a:solidFill>
-            <a:prstDash val="solid"/>
-          </a:ln>
-        </p:spPr>
-      </p:sp>
-      <p:sp>
-        <p:nvSpPr>
-          <p:cNvPr id="48" name="Text 46"/>
-          <p:cNvSpPr/>
-          <p:nvPr/>
-        </p:nvSpPr>
-        <p:spPr>
-          <a:xfrm>
-            <a:off x="9000646" y="3470148"/>
-            <a:ext cx="777240" cy="251460"/>
-          </a:xfrm>
-          <a:prstGeom prst="rect">
-            <a:avLst/>
-          </a:prstGeom>
-          <a:noFill/>
-          <a:ln/>
-        </p:spPr>
-        <p:txBody>
-          <a:bodyPr wrap="square" lIns="0" tIns="0" rIns="0" bIns="0" rtlCol="0" anchor="ctr"/>
-          <a:lstStyle/>
-          <a:p>
-            <a:pPr indent="0" marL="0">
-              <a:buNone/>
-            </a:pPr>
-            <a:r>
-              <a:rPr lang="en-US" sz="1050" b="1" dirty="0">
-                <a:solidFill>
-                  <a:srgbClr val="B4522F"/>
-                </a:solidFill>
-                <a:latin typeface="Calibri" pitchFamily="34" charset="0"/>
-                <a:ea typeface="Calibri" pitchFamily="34" charset="-122"/>
-                <a:cs typeface="Calibri" pitchFamily="34" charset="-120"/>
-              </a:rPr>
-              <a:t>0.352</a:t>
             </a:r>
             <a:endParaRPr lang="en-US" sz="1050" dirty="0"/>
           </a:p>

--- a/docs/advisory_slide.pptx
+++ b/docs/advisory_slide.pptx
@@ -506,24 +506,23 @@
 Systems such as Moshi convert speech into discrete tokens before any language model sees it, so whatever the tokeniser discards is unavailable downstream. If it discards pragmatic force, a system can recover every word correctly and still misread how the speaker meant them.
 WHAT "PROBING" MEANS
 The pretrained models are frozen, meaning never updated. We extract representations once and train only a small linear classifier on top, so any accuracy reflects what the representation already encodes rather than what a model learned for the task.
-DATA
-873 labelled clips across eight phrases (yeah, okay, right, sure, great, fine, really, come on), 753 episodes, 32 shows. Naturalistic political podcast audio rather than acted emotion corpora. Stance and arousal were labelled on independent axes so the arousal confound could be tested directly.
+THE CORPUS BEHIND THE FUNNEL
+The 7,310 hours is the full indexed collection, 6,281 episodes across 32 shows of political podcasts and broadcast programmes. It is the population sampled from rather than material analysed end to end, so describe it that way. The 873 keepers span 753 episodes and 32 shows. Candidates were drawn by a stratified pull balanced across shows and then topped up with sense-targeted and collocation-targeted pulls, because a purely random draw from a corpus this size over-samples the dominant sense of each word.
 HUMAN PREMISE CHECK, RUN BEFORE ANY MODELLING
 Two auxiliary annotators judged a counterbalanced 60-clip subset. Audio plus transcript reached 0.73 accuracy against 0.65 for transcript with discourse context, on a three-way chance of 0.33. So the contrast is partly text-recoverable but audio adds a real increment.
 WHAT COUNTS AS CHANCE
-Macro-F1 has no fixed chance value. A majority-class predictor scores only 0.196 here because macro-F1 gives zero to the two classes it never predicts, but our probe uses balanced class weights and spreads predictions across all three, so that is not its no-skill counterpart. The reference on the chart is the empirical permutation null, the same probe refit on shuffled labels, which sits near 0.33. Uniform and prior-matched random guessing give 0.322 and 0.333, agreeing closely. Against that line the continuous encoders are far above, while Mimi at 0.352 clears it only narrowly, though its own null never exceeded 0.330 in 60 runs, so the result remains significant.
+Macro-F1 has no fixed chance value. A majority-class predictor scores only 0.196 here because macro-F1 gives zero to the two classes it never predicts, but our probe uses balanced class weights and spreads predictions across all three, so that is not its no-skill counterpart. The reference on the chart is the empirical permutation null, the same probe refit on shuffled labels, which sits near 0.33. Uniform and prior-matched random guessing give 0.322 and 0.333, agreeing closely.
 ROBUSTNESS
 Matched arousal. Stance is still decoded within each arousal level separately, so the probe is not simply reading loudness.
 Speaker held out. Grouping folds by show rather than episode moves WavLM only from 0.573 to 0.530, so it is not riding speaker identity.
 Non-independence. All scores are out of fold under GroupKFold by episode, with episode-cluster bootstrap intervals and 200-permutation tests. Every representation beats chance at p at most 0.01.
 WHERE THE CONTRAST LIVES
-WavLM peaks at layer 20 of 24 and falls away above it, consistent with upper layers shedding paralinguistics. Whisper plateaus across its top third. Inside Mimi, what little survives sits in codebook 0, the WavLM-distilled stream, at 0.402. The seven acoustic refinement codebooks are at or near chance. Chapter 2 predicted the opposite, so this is reported as a correction.
+WavLM peaks at layer 20 of 24 and falls away above it, consistent with upper layers shedding paralinguistics. Whisper plateaus across its top third. Inside Mimi, what little survives sits in codebook 0, the WavLM-distilled stream, at 0.402. The seven acoustic refinement codebooks are at or near chance and five of them are not significant. Chapter 2 predicted the opposite, so this is reported as a corrected expectation.
 CAVEATS TO RAISE
+The Mimi figure is all eight codebooks, the condition a deployed model actually consumes, at 0.381 against a chance of 0.311.
 Pooled target-only text sits above chance only because the eight phrases differ in stance base rate, which is why the within-word figure is the clean lexical control.
-Mimi is significantly above chance, so the honest claim is that default tokenisation loses most of the contrast, not all of it. The loss is recoverable with deliberate effort, but deployed systems use the defaults.
-The training-free contrast-preservation score points the same way but is underpowered at 191 decisions and sensitive to the distance metric, so it is reported as corroborating only.
-NEXT
-Done. Codebook 0 is now extracted and probed. The headline Mimi figure is all 8 codebooks, the condition a deployed model actually consumes, at 0.381 against a chance of 0.311.</a:t>
+Text with discourse context clears chance by only 0.045, close to Mimi, even though humans reached 0.65 from the same context. That gap is a limitation of the frozen sentence-embedding baseline rather than evidence that context is uninformative.
+The training-free contrast-preservation score points the same way but is underpowered at 191 decisions and sensitive to the distance metric, so it is reported as corroborating only.</a:t>
             </a:r>
             <a:endParaRPr lang="en-US" dirty="0"/>
           </a:p>
@@ -904,24 +903,24 @@
         </p:nvSpPr>
         <p:spPr>
           <a:xfrm>
-            <a:off x="457200" y="256032"/>
-            <a:ext cx="11247120" cy="548640"/>
-          </a:xfrm>
-          <a:prstGeom prst="rect">
-            <a:avLst/>
-          </a:prstGeom>
-          <a:noFill/>
-          <a:ln/>
-        </p:spPr>
-        <p:txBody>
-          <a:bodyPr wrap="square" lIns="0" tIns="0" rIns="0" bIns="0" rtlCol="0" anchor="ctr"/>
-          <a:lstStyle/>
-          <a:p>
-            <a:pPr indent="0" marL="0">
-              <a:buNone/>
-            </a:pPr>
-            <a:r>
-              <a:rPr lang="en-US" sz="2700" b="1" dirty="0">
+            <a:off x="457200" y="219456"/>
+            <a:ext cx="11247120" cy="502920"/>
+          </a:xfrm>
+          <a:prstGeom prst="rect">
+            <a:avLst/>
+          </a:prstGeom>
+          <a:noFill/>
+          <a:ln/>
+        </p:spPr>
+        <p:txBody>
+          <a:bodyPr wrap="square" lIns="0" tIns="0" rIns="0" bIns="0" rtlCol="0" anchor="ctr"/>
+          <a:lstStyle/>
+          <a:p>
+            <a:pPr indent="0" marL="0">
+              <a:buNone/>
+            </a:pPr>
+            <a:r>
+              <a:rPr lang="en-US" sz="2600" b="1" dirty="0">
                 <a:solidFill>
                   <a:srgbClr val="131920"/>
                 </a:solidFill>
@@ -931,7 +930,7 @@
               </a:rPr>
               <a:t>Transcript-Equivalent Pragmatic Contrast in Speech Representations</a:t>
             </a:r>
-            <a:endParaRPr lang="en-US" sz="2700" dirty="0"/>
+            <a:endParaRPr lang="en-US" sz="2600" dirty="0"/>
           </a:p>
         </p:txBody>
       </p:sp>
@@ -943,24 +942,24 @@
         </p:nvSpPr>
         <p:spPr>
           <a:xfrm>
-            <a:off x="457200" y="850392"/>
-            <a:ext cx="11247120" cy="384048"/>
-          </a:xfrm>
-          <a:prstGeom prst="rect">
-            <a:avLst/>
-          </a:prstGeom>
-          <a:noFill/>
-          <a:ln/>
-        </p:spPr>
-        <p:txBody>
-          <a:bodyPr wrap="square" lIns="0" tIns="0" rIns="0" bIns="0" rtlCol="0" anchor="ctr"/>
-          <a:lstStyle/>
-          <a:p>
-            <a:pPr indent="0" marL="0">
-              <a:buNone/>
-            </a:pPr>
-            <a:r>
-              <a:rPr lang="en-US" sz="1450" i="1" dirty="0">
+            <a:off x="457200" y="768096"/>
+            <a:ext cx="11247120" cy="347472"/>
+          </a:xfrm>
+          <a:prstGeom prst="rect">
+            <a:avLst/>
+          </a:prstGeom>
+          <a:noFill/>
+          <a:ln/>
+        </p:spPr>
+        <p:txBody>
+          <a:bodyPr wrap="square" lIns="0" tIns="0" rIns="0" bIns="0" rtlCol="0" anchor="ctr"/>
+          <a:lstStyle/>
+          <a:p>
+            <a:pPr indent="0" marL="0">
+              <a:buNone/>
+            </a:pPr>
+            <a:r>
+              <a:rPr lang="en-US" sz="1400" i="1" dirty="0">
                 <a:solidFill>
                   <a:srgbClr val="0F7A84"/>
                 </a:solidFill>
@@ -970,7 +969,7 @@
               </a:rPr>
               <a:t>Deployed speech-to-speech systems never hear audio. They hear discrete tokens. Do those tokens still carry what a speaker meant?</a:t>
             </a:r>
-            <a:endParaRPr lang="en-US" sz="1450" dirty="0"/>
+            <a:endParaRPr lang="en-US" sz="1400" dirty="0"/>
           </a:p>
         </p:txBody>
       </p:sp>
@@ -982,24 +981,24 @@
         </p:nvSpPr>
         <p:spPr>
           <a:xfrm>
-            <a:off x="457200" y="1216152"/>
-            <a:ext cx="11247120" cy="256032"/>
-          </a:xfrm>
-          <a:prstGeom prst="rect">
-            <a:avLst/>
-          </a:prstGeom>
-          <a:noFill/>
-          <a:ln/>
-        </p:spPr>
-        <p:txBody>
-          <a:bodyPr wrap="square" lIns="0" tIns="0" rIns="0" bIns="0" rtlCol="0" anchor="ctr"/>
-          <a:lstStyle/>
-          <a:p>
-            <a:pPr indent="0" marL="0">
-              <a:buNone/>
-            </a:pPr>
-            <a:r>
-              <a:rPr lang="en-US" sz="1000" spc="60" kern="0" dirty="0">
+            <a:off x="457200" y="1097280"/>
+            <a:ext cx="11247120" cy="219456"/>
+          </a:xfrm>
+          <a:prstGeom prst="rect">
+            <a:avLst/>
+          </a:prstGeom>
+          <a:noFill/>
+          <a:ln/>
+        </p:spPr>
+        <p:txBody>
+          <a:bodyPr wrap="square" lIns="0" tIns="0" rIns="0" bIns="0" rtlCol="0" anchor="ctr"/>
+          <a:lstStyle/>
+          <a:p>
+            <a:pPr indent="0" marL="0">
+              <a:buNone/>
+            </a:pPr>
+            <a:r>
+              <a:rPr lang="en-US" sz="950" spc="60" kern="0" dirty="0">
                 <a:solidFill>
                   <a:srgbClr val="8A94A1"/>
                 </a:solidFill>
@@ -1009,7 +1008,7 @@
               </a:rPr>
               <a:t>MSc Computational Linguistics, UCL   |   Track A, Pragmatic Contrast Preservation   |   Advisory group, July 2026</a:t>
             </a:r>
-            <a:endParaRPr lang="en-US" sz="1000" dirty="0"/>
+            <a:endParaRPr lang="en-US" sz="950" dirty="0"/>
           </a:p>
         </p:txBody>
       </p:sp>
@@ -1021,12 +1020,819 @@
         </p:nvSpPr>
         <p:spPr>
           <a:xfrm>
-            <a:off x="457200" y="1627632"/>
-            <a:ext cx="3703320" cy="4023360"/>
+            <a:off x="457200" y="1335024"/>
+            <a:ext cx="11247120" cy="0"/>
+          </a:xfrm>
+          <a:prstGeom prst="line">
+            <a:avLst/>
+          </a:prstGeom>
+          <a:noFill/>
+          <a:ln w="9525">
+            <a:solidFill>
+              <a:srgbClr val="DDE1E7"/>
+            </a:solidFill>
+            <a:prstDash val="solid"/>
+          </a:ln>
+        </p:spPr>
+      </p:sp>
+      <p:sp>
+        <p:nvSpPr>
+          <p:cNvPr id="6" name="Shape 4"/>
+          <p:cNvSpPr/>
+          <p:nvPr/>
+        </p:nvSpPr>
+        <p:spPr>
+          <a:xfrm>
+            <a:off x="457200" y="1426464"/>
+            <a:ext cx="173736" cy="173736"/>
+          </a:xfrm>
+          <a:prstGeom prst="ellipse">
+            <a:avLst/>
+          </a:prstGeom>
+          <a:solidFill>
+            <a:srgbClr val="0F7A84"/>
+          </a:solidFill>
+          <a:ln w="12700">
+            <a:solidFill>
+              <a:srgbClr val="333333"/>
+            </a:solidFill>
+            <a:prstDash val="solid"/>
+          </a:ln>
+        </p:spPr>
+      </p:sp>
+      <p:sp>
+        <p:nvSpPr>
+          <p:cNvPr id="7" name="Text 5"/>
+          <p:cNvSpPr/>
+          <p:nvPr/>
+        </p:nvSpPr>
+        <p:spPr>
+          <a:xfrm>
+            <a:off x="457200" y="1426464"/>
+            <a:ext cx="173736" cy="173736"/>
+          </a:xfrm>
+          <a:prstGeom prst="rect">
+            <a:avLst/>
+          </a:prstGeom>
+          <a:noFill/>
+          <a:ln/>
+        </p:spPr>
+        <p:txBody>
+          <a:bodyPr wrap="square" lIns="0" tIns="0" rIns="0" bIns="0" rtlCol="0" anchor="ctr"/>
+          <a:lstStyle/>
+          <a:p>
+            <a:pPr algn="ctr" indent="0" marL="0">
+              <a:buNone/>
+            </a:pPr>
+            <a:r>
+              <a:rPr lang="en-US" sz="850" b="1" dirty="0">
+                <a:solidFill>
+                  <a:srgbClr val="FFFFFF"/>
+                </a:solidFill>
+                <a:latin typeface="Calibri" pitchFamily="34" charset="0"/>
+                <a:ea typeface="Calibri" pitchFamily="34" charset="-122"/>
+                <a:cs typeface="Calibri" pitchFamily="34" charset="-120"/>
+              </a:rPr>
+              <a:t>1</a:t>
+            </a:r>
+            <a:endParaRPr lang="en-US" sz="850" dirty="0"/>
+          </a:p>
+        </p:txBody>
+      </p:sp>
+      <p:sp>
+        <p:nvSpPr>
+          <p:cNvPr id="8" name="Text 6"/>
+          <p:cNvSpPr/>
+          <p:nvPr/>
+        </p:nvSpPr>
+        <p:spPr>
+          <a:xfrm>
+            <a:off x="704088" y="1417320"/>
+            <a:ext cx="3328416" cy="192024"/>
+          </a:xfrm>
+          <a:prstGeom prst="rect">
+            <a:avLst/>
+          </a:prstGeom>
+          <a:noFill/>
+          <a:ln/>
+        </p:spPr>
+        <p:txBody>
+          <a:bodyPr wrap="square" lIns="0" tIns="0" rIns="0" bIns="0" rtlCol="0" anchor="ctr"/>
+          <a:lstStyle/>
+          <a:p>
+            <a:pPr indent="0" marL="0">
+              <a:buNone/>
+            </a:pPr>
+            <a:r>
+              <a:rPr lang="en-US" sz="950" b="1" spc="100" kern="0" dirty="0">
+                <a:solidFill>
+                  <a:srgbClr val="131920"/>
+                </a:solidFill>
+                <a:latin typeface="Calibri" pitchFamily="34" charset="0"/>
+                <a:ea typeface="Calibri" pitchFamily="34" charset="-122"/>
+                <a:cs typeface="Calibri" pitchFamily="34" charset="-120"/>
+              </a:rPr>
+              <a:t>ESTABLISHED</a:t>
+            </a:r>
+            <a:endParaRPr lang="en-US" sz="950" dirty="0"/>
+          </a:p>
+        </p:txBody>
+      </p:sp>
+      <p:sp>
+        <p:nvSpPr>
+          <p:cNvPr id="9" name="Shape 7"/>
+          <p:cNvSpPr/>
+          <p:nvPr/>
+        </p:nvSpPr>
+        <p:spPr>
+          <a:xfrm>
+            <a:off x="4288536" y="1426464"/>
+            <a:ext cx="173736" cy="173736"/>
+          </a:xfrm>
+          <a:prstGeom prst="ellipse">
+            <a:avLst/>
+          </a:prstGeom>
+          <a:solidFill>
+            <a:srgbClr val="0F7A84"/>
+          </a:solidFill>
+          <a:ln w="12700">
+            <a:solidFill>
+              <a:srgbClr val="333333"/>
+            </a:solidFill>
+            <a:prstDash val="solid"/>
+          </a:ln>
+        </p:spPr>
+      </p:sp>
+      <p:sp>
+        <p:nvSpPr>
+          <p:cNvPr id="10" name="Text 8"/>
+          <p:cNvSpPr/>
+          <p:nvPr/>
+        </p:nvSpPr>
+        <p:spPr>
+          <a:xfrm>
+            <a:off x="4288536" y="1426464"/>
+            <a:ext cx="173736" cy="173736"/>
+          </a:xfrm>
+          <a:prstGeom prst="rect">
+            <a:avLst/>
+          </a:prstGeom>
+          <a:noFill/>
+          <a:ln/>
+        </p:spPr>
+        <p:txBody>
+          <a:bodyPr wrap="square" lIns="0" tIns="0" rIns="0" bIns="0" rtlCol="0" anchor="ctr"/>
+          <a:lstStyle/>
+          <a:p>
+            <a:pPr algn="ctr" indent="0" marL="0">
+              <a:buNone/>
+            </a:pPr>
+            <a:r>
+              <a:rPr lang="en-US" sz="850" b="1" dirty="0">
+                <a:solidFill>
+                  <a:srgbClr val="FFFFFF"/>
+                </a:solidFill>
+                <a:latin typeface="Calibri" pitchFamily="34" charset="0"/>
+                <a:ea typeface="Calibri" pitchFamily="34" charset="-122"/>
+                <a:cs typeface="Calibri" pitchFamily="34" charset="-120"/>
+              </a:rPr>
+              <a:t>2</a:t>
+            </a:r>
+            <a:endParaRPr lang="en-US" sz="850" dirty="0"/>
+          </a:p>
+        </p:txBody>
+      </p:sp>
+      <p:sp>
+        <p:nvSpPr>
+          <p:cNvPr id="11" name="Text 9"/>
+          <p:cNvSpPr/>
+          <p:nvPr/>
+        </p:nvSpPr>
+        <p:spPr>
+          <a:xfrm>
+            <a:off x="4535424" y="1417320"/>
+            <a:ext cx="3328416" cy="192024"/>
+          </a:xfrm>
+          <a:prstGeom prst="rect">
+            <a:avLst/>
+          </a:prstGeom>
+          <a:noFill/>
+          <a:ln/>
+        </p:spPr>
+        <p:txBody>
+          <a:bodyPr wrap="square" lIns="0" tIns="0" rIns="0" bIns="0" rtlCol="0" anchor="ctr"/>
+          <a:lstStyle/>
+          <a:p>
+            <a:pPr indent="0" marL="0">
+              <a:buNone/>
+            </a:pPr>
+            <a:r>
+              <a:rPr lang="en-US" sz="950" b="1" spc="100" kern="0" dirty="0">
+                <a:solidFill>
+                  <a:srgbClr val="131920"/>
+                </a:solidFill>
+                <a:latin typeface="Calibri" pitchFamily="34" charset="0"/>
+                <a:ea typeface="Calibri" pitchFamily="34" charset="-122"/>
+                <a:cs typeface="Calibri" pitchFamily="34" charset="-120"/>
+              </a:rPr>
+              <a:t>LEFT UNTESTED</a:t>
+            </a:r>
+            <a:endParaRPr lang="en-US" sz="950" dirty="0"/>
+          </a:p>
+        </p:txBody>
+      </p:sp>
+      <p:sp>
+        <p:nvSpPr>
+          <p:cNvPr id="12" name="Shape 10"/>
+          <p:cNvSpPr/>
+          <p:nvPr/>
+        </p:nvSpPr>
+        <p:spPr>
+          <a:xfrm>
+            <a:off x="8119872" y="1426464"/>
+            <a:ext cx="173736" cy="173736"/>
+          </a:xfrm>
+          <a:prstGeom prst="ellipse">
+            <a:avLst/>
+          </a:prstGeom>
+          <a:solidFill>
+            <a:srgbClr val="0F7A84"/>
+          </a:solidFill>
+          <a:ln w="12700">
+            <a:solidFill>
+              <a:srgbClr val="333333"/>
+            </a:solidFill>
+            <a:prstDash val="solid"/>
+          </a:ln>
+        </p:spPr>
+      </p:sp>
+      <p:sp>
+        <p:nvSpPr>
+          <p:cNvPr id="13" name="Text 11"/>
+          <p:cNvSpPr/>
+          <p:nvPr/>
+        </p:nvSpPr>
+        <p:spPr>
+          <a:xfrm>
+            <a:off x="8119872" y="1426464"/>
+            <a:ext cx="173736" cy="173736"/>
+          </a:xfrm>
+          <a:prstGeom prst="rect">
+            <a:avLst/>
+          </a:prstGeom>
+          <a:noFill/>
+          <a:ln/>
+        </p:spPr>
+        <p:txBody>
+          <a:bodyPr wrap="square" lIns="0" tIns="0" rIns="0" bIns="0" rtlCol="0" anchor="ctr"/>
+          <a:lstStyle/>
+          <a:p>
+            <a:pPr algn="ctr" indent="0" marL="0">
+              <a:buNone/>
+            </a:pPr>
+            <a:r>
+              <a:rPr lang="en-US" sz="850" b="1" dirty="0">
+                <a:solidFill>
+                  <a:srgbClr val="FFFFFF"/>
+                </a:solidFill>
+                <a:latin typeface="Calibri" pitchFamily="34" charset="0"/>
+                <a:ea typeface="Calibri" pitchFamily="34" charset="-122"/>
+                <a:cs typeface="Calibri" pitchFamily="34" charset="-120"/>
+              </a:rPr>
+              <a:t>3</a:t>
+            </a:r>
+            <a:endParaRPr lang="en-US" sz="850" dirty="0"/>
+          </a:p>
+        </p:txBody>
+      </p:sp>
+      <p:sp>
+        <p:nvSpPr>
+          <p:cNvPr id="14" name="Text 12"/>
+          <p:cNvSpPr/>
+          <p:nvPr/>
+        </p:nvSpPr>
+        <p:spPr>
+          <a:xfrm>
+            <a:off x="8366760" y="1417320"/>
+            <a:ext cx="3328416" cy="192024"/>
+          </a:xfrm>
+          <a:prstGeom prst="rect">
+            <a:avLst/>
+          </a:prstGeom>
+          <a:noFill/>
+          <a:ln/>
+        </p:spPr>
+        <p:txBody>
+          <a:bodyPr wrap="square" lIns="0" tIns="0" rIns="0" bIns="0" rtlCol="0" anchor="ctr"/>
+          <a:lstStyle/>
+          <a:p>
+            <a:pPr indent="0" marL="0">
+              <a:buNone/>
+            </a:pPr>
+            <a:r>
+              <a:rPr lang="en-US" sz="950" b="1" spc="100" kern="0" dirty="0">
+                <a:solidFill>
+                  <a:srgbClr val="131920"/>
+                </a:solidFill>
+                <a:latin typeface="Calibri" pitchFamily="34" charset="0"/>
+                <a:ea typeface="Calibri" pitchFamily="34" charset="-122"/>
+                <a:cs typeface="Calibri" pitchFamily="34" charset="-120"/>
+              </a:rPr>
+              <a:t>SO THIS STUDY</a:t>
+            </a:r>
+            <a:endParaRPr lang="en-US" sz="950" dirty="0"/>
+          </a:p>
+        </p:txBody>
+      </p:sp>
+      <p:sp>
+        <p:nvSpPr>
+          <p:cNvPr id="15" name="Text 13"/>
+          <p:cNvSpPr/>
+          <p:nvPr/>
+        </p:nvSpPr>
+        <p:spPr>
+          <a:xfrm>
+            <a:off x="457200" y="1682496"/>
+            <a:ext cx="3575304" cy="841248"/>
+          </a:xfrm>
+          <a:prstGeom prst="rect">
+            <a:avLst/>
+          </a:prstGeom>
+          <a:noFill/>
+          <a:ln/>
+        </p:spPr>
+        <p:txBody>
+          <a:bodyPr wrap="square" lIns="0" tIns="0" rIns="0" bIns="0" rtlCol="0" anchor="ctr"/>
+          <a:lstStyle/>
+          <a:p>
+            <a:pPr indent="0" marL="0">
+              <a:lnSpc>
+                <a:spcPct val="108000"/>
+              </a:lnSpc>
+              <a:buNone/>
+            </a:pPr>
+            <a:r>
+              <a:rPr lang="en-US" sz="950" dirty="0">
+                <a:solidFill>
+                  <a:srgbClr val="5C6773"/>
+                </a:solidFill>
+                <a:latin typeface="Calibri" pitchFamily="34" charset="0"/>
+                <a:ea typeface="Calibri" pitchFamily="34" charset="-122"/>
+                <a:cs typeface="Calibri" pitchFamily="34" charset="-120"/>
+              </a:rPr>
+              <a:t>Speech representations recover pragmatic phenomena better than text, shown by </a:t>
+            </a:r>
+            <a:pPr indent="0" marL="0">
+              <a:lnSpc>
+                <a:spcPct val="108000"/>
+              </a:lnSpc>
+              <a:buNone/>
+            </a:pPr>
+            <a:r>
+              <a:rPr lang="en-US" sz="950" b="1" dirty="0">
+                <a:solidFill>
+                  <a:srgbClr val="131920"/>
+                </a:solidFill>
+                <a:latin typeface="Calibri" pitchFamily="34" charset="0"/>
+                <a:ea typeface="Calibri" pitchFamily="34" charset="-122"/>
+                <a:cs typeface="Calibri" pitchFamily="34" charset="-120"/>
+              </a:rPr>
+              <a:t>Lin et al. (2022)</a:t>
+            </a:r>
+            <a:pPr indent="0" marL="0">
+              <a:lnSpc>
+                <a:spcPct val="108000"/>
+              </a:lnSpc>
+              <a:buNone/>
+            </a:pPr>
+            <a:r>
+              <a:rPr lang="en-US" sz="950" dirty="0">
+                <a:solidFill>
+                  <a:srgbClr val="5C6773"/>
+                </a:solidFill>
+                <a:latin typeface="Calibri" pitchFamily="34" charset="0"/>
+                <a:ea typeface="Calibri" pitchFamily="34" charset="-122"/>
+                <a:cs typeface="Calibri" pitchFamily="34" charset="-120"/>
+              </a:rPr>
+              <a:t> probing self-supervised models on sarcasm. Separately, discretisation is known to damage paralinguistic content (DASB, Mousavi et al. 2026). </a:t>
+            </a:r>
+            <a:pPr indent="0" marL="0">
+              <a:lnSpc>
+                <a:spcPct val="108000"/>
+              </a:lnSpc>
+              <a:buNone/>
+            </a:pPr>
+            <a:r>
+              <a:rPr lang="en-US" sz="950" i="1" dirty="0">
+                <a:solidFill>
+                  <a:srgbClr val="131920"/>
+                </a:solidFill>
+                <a:latin typeface="Calibri" pitchFamily="34" charset="0"/>
+                <a:ea typeface="Calibri" pitchFamily="34" charset="-122"/>
+                <a:cs typeface="Calibri" pitchFamily="34" charset="-120"/>
+              </a:rPr>
+              <a:t>Neither claim is reclaimed here.</a:t>
+            </a:r>
+            <a:endParaRPr lang="en-US" sz="950" dirty="0"/>
+          </a:p>
+        </p:txBody>
+      </p:sp>
+      <p:sp>
+        <p:nvSpPr>
+          <p:cNvPr id="16" name="Text 14"/>
+          <p:cNvSpPr/>
+          <p:nvPr/>
+        </p:nvSpPr>
+        <p:spPr>
+          <a:xfrm>
+            <a:off x="4288536" y="1682496"/>
+            <a:ext cx="3575304" cy="841248"/>
+          </a:xfrm>
+          <a:prstGeom prst="rect">
+            <a:avLst/>
+          </a:prstGeom>
+          <a:noFill/>
+          <a:ln/>
+        </p:spPr>
+        <p:txBody>
+          <a:bodyPr wrap="square" lIns="0" tIns="0" rIns="0" bIns="0" rtlCol="0" anchor="ctr"/>
+          <a:lstStyle/>
+          <a:p>
+            <a:pPr indent="0" marL="0">
+              <a:lnSpc>
+                <a:spcPct val="108000"/>
+              </a:lnSpc>
+              <a:buNone/>
+            </a:pPr>
+            <a:r>
+              <a:rPr lang="en-US" sz="950" dirty="0">
+                <a:solidFill>
+                  <a:srgbClr val="5C6773"/>
+                </a:solidFill>
+                <a:latin typeface="Calibri" pitchFamily="34" charset="0"/>
+                <a:ea typeface="Calibri" pitchFamily="34" charset="-122"/>
+                <a:cs typeface="Calibri" pitchFamily="34" charset="-120"/>
+              </a:rPr>
+              <a:t>Lin et al. probed </a:t>
+            </a:r>
+            <a:pPr indent="0" marL="0">
+              <a:lnSpc>
+                <a:spcPct val="108000"/>
+              </a:lnSpc>
+              <a:buNone/>
+            </a:pPr>
+            <a:r>
+              <a:rPr lang="en-US" sz="950" b="1" dirty="0">
+                <a:solidFill>
+                  <a:srgbClr val="131920"/>
+                </a:solidFill>
+                <a:latin typeface="Calibri" pitchFamily="34" charset="0"/>
+                <a:ea typeface="Calibri" pitchFamily="34" charset="-122"/>
+                <a:cs typeface="Calibri" pitchFamily="34" charset="-120"/>
+              </a:rPr>
+              <a:t>MUStARD</a:t>
+            </a:r>
+            <a:pPr indent="0" marL="0">
+              <a:lnSpc>
+                <a:spcPct val="108000"/>
+              </a:lnSpc>
+              <a:buNone/>
+            </a:pPr>
+            <a:r>
+              <a:rPr lang="en-US" sz="950" dirty="0">
+                <a:solidFill>
+                  <a:srgbClr val="5C6773"/>
+                </a:solidFill>
+                <a:latin typeface="Calibri" pitchFamily="34" charset="0"/>
+                <a:ea typeface="Calibri" pitchFamily="34" charset="-122"/>
+                <a:cs typeface="Calibri" pitchFamily="34" charset="-120"/>
+              </a:rPr>
+              <a:t>, where the utterances also differ in their words, so delivery stays confounded with word choice. That corpus is acted television speech, carries one binary sarcasm label, and no discrete tokeniser was compared. So whether tokenisation loses </a:t>
+            </a:r>
+            <a:pPr indent="0" marL="0">
+              <a:lnSpc>
+                <a:spcPct val="108000"/>
+              </a:lnSpc>
+              <a:buNone/>
+            </a:pPr>
+            <a:r>
+              <a:rPr lang="en-US" sz="950" i="1" dirty="0">
+                <a:solidFill>
+                  <a:srgbClr val="131920"/>
+                </a:solidFill>
+                <a:latin typeface="Calibri" pitchFamily="34" charset="0"/>
+                <a:ea typeface="Calibri" pitchFamily="34" charset="-122"/>
+                <a:cs typeface="Calibri" pitchFamily="34" charset="-120"/>
+              </a:rPr>
+              <a:t>meaning</a:t>
+            </a:r>
+            <a:pPr indent="0" marL="0">
+              <a:lnSpc>
+                <a:spcPct val="108000"/>
+              </a:lnSpc>
+              <a:buNone/>
+            </a:pPr>
+            <a:r>
+              <a:rPr lang="en-US" sz="950" dirty="0">
+                <a:solidFill>
+                  <a:srgbClr val="5C6773"/>
+                </a:solidFill>
+                <a:latin typeface="Calibri" pitchFamily="34" charset="0"/>
+                <a:ea typeface="Calibri" pitchFamily="34" charset="-122"/>
+                <a:cs typeface="Calibri" pitchFamily="34" charset="-120"/>
+              </a:rPr>
+              <a:t> or only </a:t>
+            </a:r>
+            <a:pPr indent="0" marL="0">
+              <a:lnSpc>
+                <a:spcPct val="108000"/>
+              </a:lnSpc>
+              <a:buNone/>
+            </a:pPr>
+            <a:r>
+              <a:rPr lang="en-US" sz="950" i="1" dirty="0">
+                <a:solidFill>
+                  <a:srgbClr val="131920"/>
+                </a:solidFill>
+                <a:latin typeface="Calibri" pitchFamily="34" charset="0"/>
+                <a:ea typeface="Calibri" pitchFamily="34" charset="-122"/>
+                <a:cs typeface="Calibri" pitchFamily="34" charset="-120"/>
+              </a:rPr>
+              <a:t>sound</a:t>
+            </a:r>
+            <a:pPr indent="0" marL="0">
+              <a:lnSpc>
+                <a:spcPct val="108000"/>
+              </a:lnSpc>
+              <a:buNone/>
+            </a:pPr>
+            <a:r>
+              <a:rPr lang="en-US" sz="950" dirty="0">
+                <a:solidFill>
+                  <a:srgbClr val="5C6773"/>
+                </a:solidFill>
+                <a:latin typeface="Calibri" pitchFamily="34" charset="0"/>
+                <a:ea typeface="Calibri" pitchFamily="34" charset="-122"/>
+                <a:cs typeface="Calibri" pitchFamily="34" charset="-120"/>
+              </a:rPr>
+              <a:t> has never been tested.</a:t>
+            </a:r>
+            <a:endParaRPr lang="en-US" sz="950" dirty="0"/>
+          </a:p>
+        </p:txBody>
+      </p:sp>
+      <p:sp>
+        <p:nvSpPr>
+          <p:cNvPr id="17" name="Text 15"/>
+          <p:cNvSpPr/>
+          <p:nvPr/>
+        </p:nvSpPr>
+        <p:spPr>
+          <a:xfrm>
+            <a:off x="8119872" y="1682496"/>
+            <a:ext cx="3575304" cy="841248"/>
+          </a:xfrm>
+          <a:prstGeom prst="rect">
+            <a:avLst/>
+          </a:prstGeom>
+          <a:noFill/>
+          <a:ln/>
+        </p:spPr>
+        <p:txBody>
+          <a:bodyPr wrap="square" lIns="0" tIns="0" rIns="0" bIns="0" rtlCol="0" anchor="ctr"/>
+          <a:lstStyle/>
+          <a:p>
+            <a:pPr indent="0" marL="0">
+              <a:lnSpc>
+                <a:spcPct val="122000"/>
+              </a:lnSpc>
+              <a:buNone/>
+            </a:pPr>
+            <a:r>
+              <a:rPr lang="en-US" sz="950" strike="sngStrike" dirty="0">
+                <a:solidFill>
+                  <a:srgbClr val="8A94A1"/>
+                </a:solidFill>
+                <a:latin typeface="Calibri" pitchFamily="34" charset="0"/>
+                <a:ea typeface="Calibri" pitchFamily="34" charset="-122"/>
+                <a:cs typeface="Calibri" pitchFamily="34" charset="-120"/>
+              </a:rPr>
+              <a:t>words vary</a:t>
+            </a:r>
+            <a:pPr indent="0" marL="0">
+              <a:lnSpc>
+                <a:spcPct val="122000"/>
+              </a:lnSpc>
+              <a:buNone/>
+            </a:pPr>
+            <a:r>
+              <a:rPr lang="en-US" sz="950" b="1" dirty="0">
+                <a:solidFill>
+                  <a:srgbClr val="0F7A84"/>
+                </a:solidFill>
+                <a:latin typeface="Calibri" pitchFamily="34" charset="0"/>
+                <a:ea typeface="Calibri" pitchFamily="34" charset="-122"/>
+                <a:cs typeface="Calibri" pitchFamily="34" charset="-120"/>
+              </a:rPr>
+              <a:t>   →   </a:t>
+            </a:r>
+            <a:pPr indent="0" marL="0">
+              <a:lnSpc>
+                <a:spcPct val="122000"/>
+              </a:lnSpc>
+              <a:buNone/>
+            </a:pPr>
+            <a:r>
+              <a:rPr lang="en-US" sz="950" dirty="0">
+                <a:solidFill>
+                  <a:srgbClr val="131920"/>
+                </a:solidFill>
+                <a:latin typeface="Calibri" pitchFamily="34" charset="0"/>
+                <a:ea typeface="Calibri" pitchFamily="34" charset="-122"/>
+                <a:cs typeface="Calibri" pitchFamily="34" charset="-120"/>
+              </a:rPr>
+              <a:t>word held constant</a:t>
+            </a:r>
+            <a:endParaRPr lang="en-US" sz="950" dirty="0"/>
+          </a:p>
+          <a:p>
+            <a:pPr indent="0" marL="0">
+              <a:lnSpc>
+                <a:spcPct val="122000"/>
+              </a:lnSpc>
+              <a:buNone/>
+            </a:pPr>
+            <a:r>
+              <a:rPr lang="en-US" sz="950" strike="sngStrike" dirty="0">
+                <a:solidFill>
+                  <a:srgbClr val="8A94A1"/>
+                </a:solidFill>
+                <a:latin typeface="Calibri" pitchFamily="34" charset="0"/>
+                <a:ea typeface="Calibri" pitchFamily="34" charset="-122"/>
+                <a:cs typeface="Calibri" pitchFamily="34" charset="-120"/>
+              </a:rPr>
+              <a:t>acted speech</a:t>
+            </a:r>
+            <a:pPr indent="0" marL="0">
+              <a:lnSpc>
+                <a:spcPct val="122000"/>
+              </a:lnSpc>
+              <a:buNone/>
+            </a:pPr>
+            <a:r>
+              <a:rPr lang="en-US" sz="950" b="1" dirty="0">
+                <a:solidFill>
+                  <a:srgbClr val="0F7A84"/>
+                </a:solidFill>
+                <a:latin typeface="Calibri" pitchFamily="34" charset="0"/>
+                <a:ea typeface="Calibri" pitchFamily="34" charset="-122"/>
+                <a:cs typeface="Calibri" pitchFamily="34" charset="-120"/>
+              </a:rPr>
+              <a:t>   →   </a:t>
+            </a:r>
+            <a:pPr indent="0" marL="0">
+              <a:lnSpc>
+                <a:spcPct val="122000"/>
+              </a:lnSpc>
+              <a:buNone/>
+            </a:pPr>
+            <a:r>
+              <a:rPr lang="en-US" sz="950" dirty="0">
+                <a:solidFill>
+                  <a:srgbClr val="131920"/>
+                </a:solidFill>
+                <a:latin typeface="Calibri" pitchFamily="34" charset="0"/>
+                <a:ea typeface="Calibri" pitchFamily="34" charset="-122"/>
+                <a:cs typeface="Calibri" pitchFamily="34" charset="-120"/>
+              </a:rPr>
+              <a:t>naturalistic podcast audio</a:t>
+            </a:r>
+            <a:endParaRPr lang="en-US" sz="950" dirty="0"/>
+          </a:p>
+          <a:p>
+            <a:pPr indent="0" marL="0">
+              <a:lnSpc>
+                <a:spcPct val="122000"/>
+              </a:lnSpc>
+              <a:buNone/>
+            </a:pPr>
+            <a:r>
+              <a:rPr lang="en-US" sz="950" strike="sngStrike" dirty="0">
+                <a:solidFill>
+                  <a:srgbClr val="8A94A1"/>
+                </a:solidFill>
+                <a:latin typeface="Calibri" pitchFamily="34" charset="0"/>
+                <a:ea typeface="Calibri" pitchFamily="34" charset="-122"/>
+                <a:cs typeface="Calibri" pitchFamily="34" charset="-120"/>
+              </a:rPr>
+              <a:t>one binary label</a:t>
+            </a:r>
+            <a:pPr indent="0" marL="0">
+              <a:lnSpc>
+                <a:spcPct val="122000"/>
+              </a:lnSpc>
+              <a:buNone/>
+            </a:pPr>
+            <a:r>
+              <a:rPr lang="en-US" sz="950" b="1" dirty="0">
+                <a:solidFill>
+                  <a:srgbClr val="0F7A84"/>
+                </a:solidFill>
+                <a:latin typeface="Calibri" pitchFamily="34" charset="0"/>
+                <a:ea typeface="Calibri" pitchFamily="34" charset="-122"/>
+                <a:cs typeface="Calibri" pitchFamily="34" charset="-120"/>
+              </a:rPr>
+              <a:t>   →   </a:t>
+            </a:r>
+            <a:pPr indent="0" marL="0">
+              <a:lnSpc>
+                <a:spcPct val="122000"/>
+              </a:lnSpc>
+              <a:buNone/>
+            </a:pPr>
+            <a:r>
+              <a:rPr lang="en-US" sz="950" dirty="0">
+                <a:solidFill>
+                  <a:srgbClr val="131920"/>
+                </a:solidFill>
+                <a:latin typeface="Calibri" pitchFamily="34" charset="0"/>
+                <a:ea typeface="Calibri" pitchFamily="34" charset="-122"/>
+                <a:cs typeface="Calibri" pitchFamily="34" charset="-120"/>
+              </a:rPr>
+              <a:t>stance and arousal on separate axes</a:t>
+            </a:r>
+            <a:endParaRPr lang="en-US" sz="950" dirty="0"/>
+          </a:p>
+          <a:p>
+            <a:pPr indent="0" marL="0">
+              <a:lnSpc>
+                <a:spcPct val="122000"/>
+              </a:lnSpc>
+              <a:buNone/>
+            </a:pPr>
+            <a:r>
+              <a:rPr lang="en-US" sz="950" strike="sngStrike" dirty="0">
+                <a:solidFill>
+                  <a:srgbClr val="8A94A1"/>
+                </a:solidFill>
+                <a:latin typeface="Calibri" pitchFamily="34" charset="0"/>
+                <a:ea typeface="Calibri" pitchFamily="34" charset="-122"/>
+                <a:cs typeface="Calibri" pitchFamily="34" charset="-120"/>
+              </a:rPr>
+              <a:t>no tokeniser tested</a:t>
+            </a:r>
+            <a:pPr indent="0" marL="0">
+              <a:lnSpc>
+                <a:spcPct val="122000"/>
+              </a:lnSpc>
+              <a:buNone/>
+            </a:pPr>
+            <a:r>
+              <a:rPr lang="en-US" sz="950" b="1" dirty="0">
+                <a:solidFill>
+                  <a:srgbClr val="0F7A84"/>
+                </a:solidFill>
+                <a:latin typeface="Calibri" pitchFamily="34" charset="0"/>
+                <a:ea typeface="Calibri" pitchFamily="34" charset="-122"/>
+                <a:cs typeface="Calibri" pitchFamily="34" charset="-120"/>
+              </a:rPr>
+              <a:t>   →   </a:t>
+            </a:r>
+            <a:pPr indent="0" marL="0">
+              <a:lnSpc>
+                <a:spcPct val="122000"/>
+              </a:lnSpc>
+              <a:buNone/>
+            </a:pPr>
+            <a:r>
+              <a:rPr lang="en-US" sz="950" dirty="0">
+                <a:solidFill>
+                  <a:srgbClr val="131920"/>
+                </a:solidFill>
+                <a:latin typeface="Calibri" pitchFamily="34" charset="0"/>
+                <a:ea typeface="Calibri" pitchFamily="34" charset="-122"/>
+                <a:cs typeface="Calibri" pitchFamily="34" charset="-120"/>
+              </a:rPr>
+              <a:t>Mimi, what deployed systems consume</a:t>
+            </a:r>
+            <a:endParaRPr lang="en-US" sz="950" dirty="0"/>
+          </a:p>
+        </p:txBody>
+      </p:sp>
+      <p:sp>
+        <p:nvSpPr>
+          <p:cNvPr id="18" name="Shape 16"/>
+          <p:cNvSpPr/>
+          <p:nvPr/>
+        </p:nvSpPr>
+        <p:spPr>
+          <a:xfrm>
+            <a:off x="457200" y="2578608"/>
+            <a:ext cx="3703320" cy="2724912"/>
           </a:xfrm>
           <a:prstGeom prst="roundRect">
             <a:avLst>
-              <a:gd name="adj" fmla="val 1481"/>
+              <a:gd name="adj" fmla="val 2013"/>
             </a:avLst>
           </a:prstGeom>
           <a:solidFill>
@@ -1042,30 +1848,30 @@
       </p:sp>
       <p:sp>
         <p:nvSpPr>
-          <p:cNvPr id="6" name="Text 4"/>
-          <p:cNvSpPr/>
-          <p:nvPr/>
-        </p:nvSpPr>
-        <p:spPr>
-          <a:xfrm>
-            <a:off x="658368" y="1773936"/>
-            <a:ext cx="3300984" cy="219456"/>
-          </a:xfrm>
-          <a:prstGeom prst="rect">
-            <a:avLst/>
-          </a:prstGeom>
-          <a:noFill/>
-          <a:ln/>
-        </p:spPr>
-        <p:txBody>
-          <a:bodyPr wrap="square" lIns="0" tIns="0" rIns="0" bIns="0" rtlCol="0" anchor="ctr"/>
-          <a:lstStyle/>
-          <a:p>
-            <a:pPr indent="0" marL="0">
-              <a:buNone/>
-            </a:pPr>
-            <a:r>
-              <a:rPr lang="en-US" sz="950" b="1" spc="110" kern="0" dirty="0">
+          <p:cNvPr id="19" name="Text 17"/>
+          <p:cNvSpPr/>
+          <p:nvPr/>
+        </p:nvSpPr>
+        <p:spPr>
+          <a:xfrm>
+            <a:off x="658368" y="2697480"/>
+            <a:ext cx="3300984" cy="201168"/>
+          </a:xfrm>
+          <a:prstGeom prst="rect">
+            <a:avLst/>
+          </a:prstGeom>
+          <a:noFill/>
+          <a:ln/>
+        </p:spPr>
+        <p:txBody>
+          <a:bodyPr wrap="square" lIns="0" tIns="0" rIns="0" bIns="0" rtlCol="0" anchor="ctr"/>
+          <a:lstStyle/>
+          <a:p>
+            <a:pPr indent="0" marL="0">
+              <a:buNone/>
+            </a:pPr>
+            <a:r>
+              <a:rPr lang="en-US" sz="900" b="1" spc="110" kern="0" dirty="0">
                 <a:solidFill>
                   <a:srgbClr val="0F7A84"/>
                 </a:solidFill>
@@ -1075,20 +1881,20 @@
               </a:rPr>
               <a:t>THE DESIGN MOVE, LEXICAL CONTROL</a:t>
             </a:r>
-            <a:endParaRPr lang="en-US" sz="950" dirty="0"/>
-          </a:p>
-        </p:txBody>
-      </p:sp>
-      <p:sp>
-        <p:nvSpPr>
-          <p:cNvPr id="7" name="Text 5"/>
-          <p:cNvSpPr/>
-          <p:nvPr/>
-        </p:nvSpPr>
-        <p:spPr>
-          <a:xfrm>
-            <a:off x="658368" y="2103120"/>
-            <a:ext cx="1371600" cy="566928"/>
+            <a:endParaRPr lang="en-US" sz="900" dirty="0"/>
+          </a:p>
+        </p:txBody>
+      </p:sp>
+      <p:sp>
+        <p:nvSpPr>
+          <p:cNvPr id="20" name="Text 18"/>
+          <p:cNvSpPr/>
+          <p:nvPr/>
+        </p:nvSpPr>
+        <p:spPr>
+          <a:xfrm>
+            <a:off x="658368" y="2962656"/>
+            <a:ext cx="1371600" cy="502920"/>
           </a:xfrm>
           <a:prstGeom prst="rect">
             <a:avLst/>
@@ -1104,7 +1910,7 @@
               <a:buNone/>
             </a:pPr>
             <a:r>
-              <a:rPr lang="en-US" sz="3200" b="1" dirty="0">
+              <a:rPr lang="en-US" sz="2800" b="1" dirty="0">
                 <a:solidFill>
                   <a:srgbClr val="0F7A84"/>
                 </a:solidFill>
@@ -1114,20 +1920,20 @@
               </a:rPr>
               <a:t>yeah</a:t>
             </a:r>
-            <a:endParaRPr lang="en-US" sz="3200" dirty="0"/>
-          </a:p>
-        </p:txBody>
-      </p:sp>
-      <p:sp>
-        <p:nvSpPr>
-          <p:cNvPr id="8" name="Text 6"/>
-          <p:cNvSpPr/>
-          <p:nvPr/>
-        </p:nvSpPr>
-        <p:spPr>
-          <a:xfrm>
-            <a:off x="2029968" y="2267712"/>
-            <a:ext cx="365760" cy="274320"/>
+            <a:endParaRPr lang="en-US" sz="2800" dirty="0"/>
+          </a:p>
+        </p:txBody>
+      </p:sp>
+      <p:sp>
+        <p:nvSpPr>
+          <p:cNvPr id="21" name="Text 19"/>
+          <p:cNvSpPr/>
+          <p:nvPr/>
+        </p:nvSpPr>
+        <p:spPr>
+          <a:xfrm>
+            <a:off x="2029968" y="3099816"/>
+            <a:ext cx="365760" cy="237744"/>
           </a:xfrm>
           <a:prstGeom prst="rect">
             <a:avLst/>
@@ -1143,7 +1949,7 @@
               <a:buNone/>
             </a:pPr>
             <a:r>
-              <a:rPr lang="en-US" sz="1100" dirty="0">
+              <a:rPr lang="en-US" sz="1000" dirty="0">
                 <a:solidFill>
                   <a:srgbClr val="8A94A1"/>
                 </a:solidFill>
@@ -1153,20 +1959,20 @@
               </a:rPr>
               <a:t>vs</a:t>
             </a:r>
-            <a:endParaRPr lang="en-US" sz="1100" dirty="0"/>
-          </a:p>
-        </p:txBody>
-      </p:sp>
-      <p:sp>
-        <p:nvSpPr>
-          <p:cNvPr id="9" name="Text 7"/>
-          <p:cNvSpPr/>
-          <p:nvPr/>
-        </p:nvSpPr>
-        <p:spPr>
-          <a:xfrm>
-            <a:off x="2395728" y="2103120"/>
-            <a:ext cx="1371600" cy="566928"/>
+            <a:endParaRPr lang="en-US" sz="1000" dirty="0"/>
+          </a:p>
+        </p:txBody>
+      </p:sp>
+      <p:sp>
+        <p:nvSpPr>
+          <p:cNvPr id="22" name="Text 20"/>
+          <p:cNvSpPr/>
+          <p:nvPr/>
+        </p:nvSpPr>
+        <p:spPr>
+          <a:xfrm>
+            <a:off x="2395728" y="2962656"/>
+            <a:ext cx="1371600" cy="502920"/>
           </a:xfrm>
           <a:prstGeom prst="rect">
             <a:avLst/>
@@ -1182,7 +1988,7 @@
               <a:buNone/>
             </a:pPr>
             <a:r>
-              <a:rPr lang="en-US" sz="3200" b="1" i="1" dirty="0">
+              <a:rPr lang="en-US" sz="2800" b="1" i="1" dirty="0">
                 <a:solidFill>
                   <a:srgbClr val="B4522F"/>
                 </a:solidFill>
@@ -1192,20 +1998,20 @@
               </a:rPr>
               <a:t>yeah</a:t>
             </a:r>
-            <a:endParaRPr lang="en-US" sz="3200" dirty="0"/>
-          </a:p>
-        </p:txBody>
-      </p:sp>
-      <p:sp>
-        <p:nvSpPr>
-          <p:cNvPr id="10" name="Text 8"/>
-          <p:cNvSpPr/>
-          <p:nvPr/>
-        </p:nvSpPr>
-        <p:spPr>
-          <a:xfrm>
-            <a:off x="548640" y="2670048"/>
-            <a:ext cx="1591056" cy="201168"/>
+            <a:endParaRPr lang="en-US" sz="2800" dirty="0"/>
+          </a:p>
+        </p:txBody>
+      </p:sp>
+      <p:sp>
+        <p:nvSpPr>
+          <p:cNvPr id="23" name="Text 21"/>
+          <p:cNvSpPr/>
+          <p:nvPr/>
+        </p:nvSpPr>
+        <p:spPr>
+          <a:xfrm>
+            <a:off x="548640" y="3483864"/>
+            <a:ext cx="1591056" cy="182880"/>
           </a:xfrm>
           <a:prstGeom prst="rect">
             <a:avLst/>
@@ -1221,7 +2027,7 @@
               <a:buNone/>
             </a:pPr>
             <a:r>
-              <a:rPr lang="en-US" sz="850" b="1" spc="50" kern="0" dirty="0">
+              <a:rPr lang="en-US" sz="800" b="1" spc="50" kern="0" dirty="0">
                 <a:solidFill>
                   <a:srgbClr val="5C6773"/>
                 </a:solidFill>
@@ -1231,20 +2037,20 @@
               </a:rPr>
               <a:t>SINCERE AGREEMENT</a:t>
             </a:r>
-            <a:endParaRPr lang="en-US" sz="850" dirty="0"/>
-          </a:p>
-        </p:txBody>
-      </p:sp>
-      <p:sp>
-        <p:nvSpPr>
-          <p:cNvPr id="11" name="Text 9"/>
-          <p:cNvSpPr/>
-          <p:nvPr/>
-        </p:nvSpPr>
-        <p:spPr>
-          <a:xfrm>
-            <a:off x="2286000" y="2670048"/>
-            <a:ext cx="1591056" cy="201168"/>
+            <a:endParaRPr lang="en-US" sz="800" dirty="0"/>
+          </a:p>
+        </p:txBody>
+      </p:sp>
+      <p:sp>
+        <p:nvSpPr>
+          <p:cNvPr id="24" name="Text 22"/>
+          <p:cNvSpPr/>
+          <p:nvPr/>
+        </p:nvSpPr>
+        <p:spPr>
+          <a:xfrm>
+            <a:off x="2286000" y="3483864"/>
+            <a:ext cx="1591056" cy="182880"/>
           </a:xfrm>
           <a:prstGeom prst="rect">
             <a:avLst/>
@@ -1260,7 +2066,7 @@
               <a:buNone/>
             </a:pPr>
             <a:r>
-              <a:rPr lang="en-US" sz="850" b="1" spc="50" kern="0" dirty="0">
+              <a:rPr lang="en-US" sz="800" b="1" spc="50" kern="0" dirty="0">
                 <a:solidFill>
                   <a:srgbClr val="5C6773"/>
                 </a:solidFill>
@@ -1270,20 +2076,20 @@
               </a:rPr>
               <a:t>SARCASTIC DISMISSAL</a:t>
             </a:r>
-            <a:endParaRPr lang="en-US" sz="850" dirty="0"/>
-          </a:p>
-        </p:txBody>
-      </p:sp>
-      <p:sp>
-        <p:nvSpPr>
-          <p:cNvPr id="12" name="Text 10"/>
-          <p:cNvSpPr/>
-          <p:nvPr/>
-        </p:nvSpPr>
-        <p:spPr>
-          <a:xfrm>
-            <a:off x="658368" y="2962656"/>
-            <a:ext cx="3300984" cy="237744"/>
+            <a:endParaRPr lang="en-US" sz="800" dirty="0"/>
+          </a:p>
+        </p:txBody>
+      </p:sp>
+      <p:sp>
+        <p:nvSpPr>
+          <p:cNvPr id="25" name="Text 23"/>
+          <p:cNvSpPr/>
+          <p:nvPr/>
+        </p:nvSpPr>
+        <p:spPr>
+          <a:xfrm>
+            <a:off x="658368" y="3721608"/>
+            <a:ext cx="3300984" cy="219456"/>
           </a:xfrm>
           <a:prstGeom prst="rect">
             <a:avLst/>
@@ -1299,7 +2105,7 @@
               <a:buNone/>
             </a:pPr>
             <a:r>
-              <a:rPr lang="en-US" sz="1250" i="1" dirty="0">
+              <a:rPr lang="en-US" sz="1200" i="1" dirty="0">
                 <a:solidFill>
                   <a:srgbClr val="131920"/>
                 </a:solidFill>
@@ -1309,39 +2115,98 @@
               </a:rPr>
               <a:t>Identical transcript. Opposite meaning.</a:t>
             </a:r>
-            <a:endParaRPr lang="en-US" sz="1250" dirty="0"/>
-          </a:p>
-        </p:txBody>
-      </p:sp>
-      <p:sp>
-        <p:nvSpPr>
-          <p:cNvPr id="13" name="Text 11"/>
-          <p:cNvSpPr/>
-          <p:nvPr/>
-        </p:nvSpPr>
-        <p:spPr>
-          <a:xfrm>
-            <a:off x="658368" y="3291840"/>
-            <a:ext cx="3300984" cy="1170432"/>
-          </a:xfrm>
-          <a:prstGeom prst="rect">
-            <a:avLst/>
-          </a:prstGeom>
-          <a:noFill/>
-          <a:ln/>
-        </p:spPr>
-        <p:txBody>
-          <a:bodyPr wrap="square" lIns="0" tIns="0" rIns="0" bIns="0" rtlCol="0" anchor="ctr"/>
-          <a:lstStyle/>
-          <a:p>
-            <a:pPr indent="0" marL="0">
-              <a:lnSpc>
-                <a:spcPct val="112000"/>
-              </a:lnSpc>
-              <a:buNone/>
-            </a:pPr>
-            <a:r>
-              <a:rPr lang="en-US" sz="1100" dirty="0">
+            <a:endParaRPr lang="en-US" sz="1200" dirty="0"/>
+          </a:p>
+        </p:txBody>
+      </p:sp>
+      <p:sp>
+        <p:nvSpPr>
+          <p:cNvPr id="26" name="Shape 24"/>
+          <p:cNvSpPr/>
+          <p:nvPr/>
+        </p:nvSpPr>
+        <p:spPr>
+          <a:xfrm>
+            <a:off x="658368" y="4005072"/>
+            <a:ext cx="3300984" cy="0"/>
+          </a:xfrm>
+          <a:prstGeom prst="line">
+            <a:avLst/>
+          </a:prstGeom>
+          <a:noFill/>
+          <a:ln w="9525">
+            <a:solidFill>
+              <a:srgbClr val="DDE1E7"/>
+            </a:solidFill>
+            <a:prstDash val="solid"/>
+          </a:ln>
+        </p:spPr>
+      </p:sp>
+      <p:sp>
+        <p:nvSpPr>
+          <p:cNvPr id="27" name="Text 25"/>
+          <p:cNvSpPr/>
+          <p:nvPr/>
+        </p:nvSpPr>
+        <p:spPr>
+          <a:xfrm>
+            <a:off x="658368" y="4096512"/>
+            <a:ext cx="731520" cy="274320"/>
+          </a:xfrm>
+          <a:prstGeom prst="rect">
+            <a:avLst/>
+          </a:prstGeom>
+          <a:noFill/>
+          <a:ln/>
+        </p:spPr>
+        <p:txBody>
+          <a:bodyPr wrap="square" lIns="0" tIns="0" rIns="0" bIns="0" rtlCol="0" anchor="ctr"/>
+          <a:lstStyle/>
+          <a:p>
+            <a:pPr algn="r" indent="0" marL="0">
+              <a:buNone/>
+            </a:pPr>
+            <a:r>
+              <a:rPr lang="en-US" sz="1500" b="1" dirty="0">
+                <a:solidFill>
+                  <a:srgbClr val="131920"/>
+                </a:solidFill>
+                <a:latin typeface="Calibri" pitchFamily="34" charset="0"/>
+                <a:ea typeface="Calibri" pitchFamily="34" charset="-122"/>
+                <a:cs typeface="Calibri" pitchFamily="34" charset="-120"/>
+              </a:rPr>
+              <a:t>7,310</a:t>
+            </a:r>
+            <a:endParaRPr lang="en-US" sz="1500" dirty="0"/>
+          </a:p>
+        </p:txBody>
+      </p:sp>
+      <p:sp>
+        <p:nvSpPr>
+          <p:cNvPr id="28" name="Text 26"/>
+          <p:cNvSpPr/>
+          <p:nvPr/>
+        </p:nvSpPr>
+        <p:spPr>
+          <a:xfrm>
+            <a:off x="1463040" y="4096512"/>
+            <a:ext cx="2450592" cy="274320"/>
+          </a:xfrm>
+          <a:prstGeom prst="rect">
+            <a:avLst/>
+          </a:prstGeom>
+          <a:noFill/>
+          <a:ln/>
+        </p:spPr>
+        <p:txBody>
+          <a:bodyPr wrap="square" lIns="0" tIns="0" rIns="0" bIns="0" rtlCol="0" anchor="ctr"/>
+          <a:lstStyle/>
+          <a:p>
+            <a:pPr indent="0" marL="0">
+              <a:buNone/>
+            </a:pPr>
+            <a:r>
+              <a:rPr lang="en-US" sz="850" dirty="0">
                 <a:solidFill>
                   <a:srgbClr val="5C6773"/>
                 </a:solidFill>
@@ -1349,38 +2214,77 @@
                 <a:ea typeface="Calibri" pitchFamily="34" charset="-122"/>
                 <a:cs typeface="Calibri" pitchFamily="34" charset="-120"/>
               </a:rPr>
-              <a:t>Earlier work showed speech beats text on pragmatic tasks, but the utterances also differed in wording, so delivery stayed confounded with word choice. Holding the word constant removes that explanation. Whatever a probe recovers has to come from how it was said.</a:t>
-            </a:r>
-            <a:endParaRPr lang="en-US" sz="1100" dirty="0"/>
-          </a:p>
-        </p:txBody>
-      </p:sp>
-      <p:sp>
-        <p:nvSpPr>
-          <p:cNvPr id="14" name="Text 12"/>
-          <p:cNvSpPr/>
-          <p:nvPr/>
-        </p:nvSpPr>
-        <p:spPr>
-          <a:xfrm>
-            <a:off x="658368" y="4590288"/>
-            <a:ext cx="1078992" cy="310896"/>
-          </a:xfrm>
-          <a:prstGeom prst="rect">
-            <a:avLst/>
-          </a:prstGeom>
-          <a:noFill/>
-          <a:ln/>
-        </p:spPr>
-        <p:txBody>
-          <a:bodyPr wrap="square" lIns="0" tIns="0" rIns="0" bIns="0" rtlCol="0" anchor="ctr"/>
-          <a:lstStyle/>
-          <a:p>
-            <a:pPr indent="0" marL="0">
-              <a:buNone/>
-            </a:pPr>
-            <a:r>
-              <a:rPr lang="en-US" sz="1900" b="1" dirty="0">
+              <a:t>hours of podcast audio indexed, 6,281 episodes</a:t>
+            </a:r>
+            <a:endParaRPr lang="en-US" sz="850" dirty="0"/>
+          </a:p>
+        </p:txBody>
+      </p:sp>
+      <p:sp>
+        <p:nvSpPr>
+          <p:cNvPr id="29" name="Text 27"/>
+          <p:cNvSpPr/>
+          <p:nvPr/>
+        </p:nvSpPr>
+        <p:spPr>
+          <a:xfrm>
+            <a:off x="658368" y="4288536"/>
+            <a:ext cx="731520" cy="146304"/>
+          </a:xfrm>
+          <a:prstGeom prst="rect">
+            <a:avLst/>
+          </a:prstGeom>
+          <a:noFill/>
+          <a:ln/>
+        </p:spPr>
+        <p:txBody>
+          <a:bodyPr wrap="square" lIns="0" tIns="0" rIns="0" bIns="0" rtlCol="0" anchor="ctr"/>
+          <a:lstStyle/>
+          <a:p>
+            <a:pPr algn="r" indent="0" marL="0">
+              <a:buNone/>
+            </a:pPr>
+            <a:r>
+              <a:rPr lang="en-US" sz="800" dirty="0">
+                <a:solidFill>
+                  <a:srgbClr val="8A94A1"/>
+                </a:solidFill>
+                <a:latin typeface="Calibri" pitchFamily="34" charset="0"/>
+                <a:ea typeface="Calibri" pitchFamily="34" charset="-122"/>
+                <a:cs typeface="Calibri" pitchFamily="34" charset="-120"/>
+              </a:rPr>
+              <a:t>↓</a:t>
+            </a:r>
+            <a:endParaRPr lang="en-US" sz="800" dirty="0"/>
+          </a:p>
+        </p:txBody>
+      </p:sp>
+      <p:sp>
+        <p:nvSpPr>
+          <p:cNvPr id="30" name="Text 28"/>
+          <p:cNvSpPr/>
+          <p:nvPr/>
+        </p:nvSpPr>
+        <p:spPr>
+          <a:xfrm>
+            <a:off x="658368" y="4425696"/>
+            <a:ext cx="731520" cy="274320"/>
+          </a:xfrm>
+          <a:prstGeom prst="rect">
+            <a:avLst/>
+          </a:prstGeom>
+          <a:noFill/>
+          <a:ln/>
+        </p:spPr>
+        <p:txBody>
+          <a:bodyPr wrap="square" lIns="0" tIns="0" rIns="0" bIns="0" rtlCol="0" anchor="ctr"/>
+          <a:lstStyle/>
+          <a:p>
+            <a:pPr algn="r" indent="0" marL="0">
+              <a:buNone/>
+            </a:pPr>
+            <a:r>
+              <a:rPr lang="en-US" sz="1500" b="1" dirty="0">
                 <a:solidFill>
                   <a:srgbClr val="131920"/>
                 </a:solidFill>
@@ -1388,38 +2292,155 @@
                 <a:ea typeface="Calibri" pitchFamily="34" charset="-122"/>
                 <a:cs typeface="Calibri" pitchFamily="34" charset="-120"/>
               </a:rPr>
+              <a:t>767k</a:t>
+            </a:r>
+            <a:endParaRPr lang="en-US" sz="1500" dirty="0"/>
+          </a:p>
+        </p:txBody>
+      </p:sp>
+      <p:sp>
+        <p:nvSpPr>
+          <p:cNvPr id="31" name="Text 29"/>
+          <p:cNvSpPr/>
+          <p:nvPr/>
+        </p:nvSpPr>
+        <p:spPr>
+          <a:xfrm>
+            <a:off x="1463040" y="4425696"/>
+            <a:ext cx="2450592" cy="274320"/>
+          </a:xfrm>
+          <a:prstGeom prst="rect">
+            <a:avLst/>
+          </a:prstGeom>
+          <a:noFill/>
+          <a:ln/>
+        </p:spPr>
+        <p:txBody>
+          <a:bodyPr wrap="square" lIns="0" tIns="0" rIns="0" bIns="0" rtlCol="0" anchor="ctr"/>
+          <a:lstStyle/>
+          <a:p>
+            <a:pPr indent="0" marL="0">
+              <a:buNone/>
+            </a:pPr>
+            <a:r>
+              <a:rPr lang="en-US" sz="850" dirty="0">
+                <a:solidFill>
+                  <a:srgbClr val="5C6773"/>
+                </a:solidFill>
+                <a:latin typeface="Calibri" pitchFamily="34" charset="0"/>
+                <a:ea typeface="Calibri" pitchFamily="34" charset="-122"/>
+                <a:cs typeface="Calibri" pitchFamily="34" charset="-120"/>
+              </a:rPr>
+              <a:t>occurrences of the eight phrases after filtering</a:t>
+            </a:r>
+            <a:endParaRPr lang="en-US" sz="850" dirty="0"/>
+          </a:p>
+        </p:txBody>
+      </p:sp>
+      <p:sp>
+        <p:nvSpPr>
+          <p:cNvPr id="32" name="Text 30"/>
+          <p:cNvSpPr/>
+          <p:nvPr/>
+        </p:nvSpPr>
+        <p:spPr>
+          <a:xfrm>
+            <a:off x="658368" y="4617720"/>
+            <a:ext cx="731520" cy="146304"/>
+          </a:xfrm>
+          <a:prstGeom prst="rect">
+            <a:avLst/>
+          </a:prstGeom>
+          <a:noFill/>
+          <a:ln/>
+        </p:spPr>
+        <p:txBody>
+          <a:bodyPr wrap="square" lIns="0" tIns="0" rIns="0" bIns="0" rtlCol="0" anchor="ctr"/>
+          <a:lstStyle/>
+          <a:p>
+            <a:pPr algn="r" indent="0" marL="0">
+              <a:buNone/>
+            </a:pPr>
+            <a:r>
+              <a:rPr lang="en-US" sz="800" dirty="0">
+                <a:solidFill>
+                  <a:srgbClr val="8A94A1"/>
+                </a:solidFill>
+                <a:latin typeface="Calibri" pitchFamily="34" charset="0"/>
+                <a:ea typeface="Calibri" pitchFamily="34" charset="-122"/>
+                <a:cs typeface="Calibri" pitchFamily="34" charset="-120"/>
+              </a:rPr>
+              <a:t>↓</a:t>
+            </a:r>
+            <a:endParaRPr lang="en-US" sz="800" dirty="0"/>
+          </a:p>
+        </p:txBody>
+      </p:sp>
+      <p:sp>
+        <p:nvSpPr>
+          <p:cNvPr id="33" name="Text 31"/>
+          <p:cNvSpPr/>
+          <p:nvPr/>
+        </p:nvSpPr>
+        <p:spPr>
+          <a:xfrm>
+            <a:off x="658368" y="4754880"/>
+            <a:ext cx="731520" cy="274320"/>
+          </a:xfrm>
+          <a:prstGeom prst="rect">
+            <a:avLst/>
+          </a:prstGeom>
+          <a:noFill/>
+          <a:ln/>
+        </p:spPr>
+        <p:txBody>
+          <a:bodyPr wrap="square" lIns="0" tIns="0" rIns="0" bIns="0" rtlCol="0" anchor="ctr"/>
+          <a:lstStyle/>
+          <a:p>
+            <a:pPr algn="r" indent="0" marL="0">
+              <a:buNone/>
+            </a:pPr>
+            <a:r>
+              <a:rPr lang="en-US" sz="1500" b="1" dirty="0">
+                <a:solidFill>
+                  <a:srgbClr val="0F7A84"/>
+                </a:solidFill>
+                <a:latin typeface="Calibri" pitchFamily="34" charset="0"/>
+                <a:ea typeface="Calibri" pitchFamily="34" charset="-122"/>
+                <a:cs typeface="Calibri" pitchFamily="34" charset="-120"/>
+              </a:rPr>
               <a:t>873</a:t>
             </a:r>
-            <a:endParaRPr lang="en-US" sz="1900" dirty="0"/>
-          </a:p>
-        </p:txBody>
-      </p:sp>
-      <p:sp>
-        <p:nvSpPr>
-          <p:cNvPr id="15" name="Text 13"/>
-          <p:cNvSpPr/>
-          <p:nvPr/>
-        </p:nvSpPr>
-        <p:spPr>
-          <a:xfrm>
-            <a:off x="658368" y="4901184"/>
-            <a:ext cx="1078992" cy="420624"/>
-          </a:xfrm>
-          <a:prstGeom prst="rect">
-            <a:avLst/>
-          </a:prstGeom>
-          <a:noFill/>
-          <a:ln/>
-        </p:spPr>
-        <p:txBody>
-          <a:bodyPr wrap="square" lIns="0" tIns="0" rIns="0" bIns="0" rtlCol="0" anchor="ctr"/>
-          <a:lstStyle/>
-          <a:p>
-            <a:pPr indent="0" marL="0">
-              <a:buNone/>
-            </a:pPr>
-            <a:r>
-              <a:rPr lang="en-US" sz="900" dirty="0">
+            <a:endParaRPr lang="en-US" sz="1500" dirty="0"/>
+          </a:p>
+        </p:txBody>
+      </p:sp>
+      <p:sp>
+        <p:nvSpPr>
+          <p:cNvPr id="34" name="Text 32"/>
+          <p:cNvSpPr/>
+          <p:nvPr/>
+        </p:nvSpPr>
+        <p:spPr>
+          <a:xfrm>
+            <a:off x="1463040" y="4754880"/>
+            <a:ext cx="2450592" cy="274320"/>
+          </a:xfrm>
+          <a:prstGeom prst="rect">
+            <a:avLst/>
+          </a:prstGeom>
+          <a:noFill/>
+          <a:ln/>
+        </p:spPr>
+        <p:txBody>
+          <a:bodyPr wrap="square" lIns="0" tIns="0" rIns="0" bIns="0" rtlCol="0" anchor="ctr"/>
+          <a:lstStyle/>
+          <a:p>
+            <a:pPr indent="0" marL="0">
+              <a:buNone/>
+            </a:pPr>
+            <a:r>
+              <a:rPr lang="en-US" sz="850" dirty="0">
                 <a:solidFill>
                   <a:srgbClr val="5C6773"/>
                 </a:solidFill>
@@ -1427,7 +2448,46 @@
                 <a:ea typeface="Calibri" pitchFamily="34" charset="-122"/>
                 <a:cs typeface="Calibri" pitchFamily="34" charset="-120"/>
               </a:rPr>
-              <a:t>labelled clips</a:t>
+              <a:t>hand-labelled clips across 753 episodes</a:t>
+            </a:r>
+            <a:endParaRPr lang="en-US" sz="850" dirty="0"/>
+          </a:p>
+        </p:txBody>
+      </p:sp>
+      <p:sp>
+        <p:nvSpPr>
+          <p:cNvPr id="35" name="Text 33"/>
+          <p:cNvSpPr/>
+          <p:nvPr/>
+        </p:nvSpPr>
+        <p:spPr>
+          <a:xfrm>
+            <a:off x="4370832" y="2596896"/>
+            <a:ext cx="7333488" cy="201168"/>
+          </a:xfrm>
+          <a:prstGeom prst="rect">
+            <a:avLst/>
+          </a:prstGeom>
+          <a:noFill/>
+          <a:ln/>
+        </p:spPr>
+        <p:txBody>
+          <a:bodyPr wrap="square" lIns="0" tIns="0" rIns="0" bIns="0" rtlCol="0" anchor="ctr"/>
+          <a:lstStyle/>
+          <a:p>
+            <a:pPr indent="0" marL="0">
+              <a:buNone/>
+            </a:pPr>
+            <a:r>
+              <a:rPr lang="en-US" sz="900" b="1" spc="110" kern="0" dirty="0">
+                <a:solidFill>
+                  <a:srgbClr val="0F7A84"/>
+                </a:solidFill>
+                <a:latin typeface="Calibri" pitchFamily="34" charset="0"/>
+                <a:ea typeface="Calibri" pitchFamily="34" charset="-122"/>
+                <a:cs typeface="Calibri" pitchFamily="34" charset="-120"/>
+              </a:rPr>
+              <a:t>HOW WELL EACH REPRESENTATION RECOVERS SPEAKER STANCE</a:t>
             </a:r>
             <a:endParaRPr lang="en-US" sz="900" dirty="0"/>
           </a:p>
@@ -1435,209 +2495,14 @@
       </p:sp>
       <p:sp>
         <p:nvSpPr>
-          <p:cNvPr id="16" name="Text 14"/>
-          <p:cNvSpPr/>
-          <p:nvPr/>
-        </p:nvSpPr>
-        <p:spPr>
-          <a:xfrm>
-            <a:off x="1773936" y="4590288"/>
-            <a:ext cx="1078992" cy="310896"/>
-          </a:xfrm>
-          <a:prstGeom prst="rect">
-            <a:avLst/>
-          </a:prstGeom>
-          <a:noFill/>
-          <a:ln/>
-        </p:spPr>
-        <p:txBody>
-          <a:bodyPr wrap="square" lIns="0" tIns="0" rIns="0" bIns="0" rtlCol="0" anchor="ctr"/>
-          <a:lstStyle/>
-          <a:p>
-            <a:pPr indent="0" marL="0">
-              <a:buNone/>
-            </a:pPr>
-            <a:r>
-              <a:rPr lang="en-US" sz="1900" b="1" dirty="0">
-                <a:solidFill>
-                  <a:srgbClr val="131920"/>
-                </a:solidFill>
-                <a:latin typeface="Calibri" pitchFamily="34" charset="0"/>
-                <a:ea typeface="Calibri" pitchFamily="34" charset="-122"/>
-                <a:cs typeface="Calibri" pitchFamily="34" charset="-120"/>
-              </a:rPr>
-              <a:t>8</a:t>
-            </a:r>
-            <a:endParaRPr lang="en-US" sz="1900" dirty="0"/>
-          </a:p>
-        </p:txBody>
-      </p:sp>
-      <p:sp>
-        <p:nvSpPr>
-          <p:cNvPr id="17" name="Text 15"/>
-          <p:cNvSpPr/>
-          <p:nvPr/>
-        </p:nvSpPr>
-        <p:spPr>
-          <a:xfrm>
-            <a:off x="1773936" y="4901184"/>
-            <a:ext cx="1078992" cy="420624"/>
-          </a:xfrm>
-          <a:prstGeom prst="rect">
-            <a:avLst/>
-          </a:prstGeom>
-          <a:noFill/>
-          <a:ln/>
-        </p:spPr>
-        <p:txBody>
-          <a:bodyPr wrap="square" lIns="0" tIns="0" rIns="0" bIns="0" rtlCol="0" anchor="ctr"/>
-          <a:lstStyle/>
-          <a:p>
-            <a:pPr indent="0" marL="0">
-              <a:buNone/>
-            </a:pPr>
-            <a:r>
-              <a:rPr lang="en-US" sz="900" dirty="0">
-                <a:solidFill>
-                  <a:srgbClr val="5C6773"/>
-                </a:solidFill>
-                <a:latin typeface="Calibri" pitchFamily="34" charset="0"/>
-                <a:ea typeface="Calibri" pitchFamily="34" charset="-122"/>
-                <a:cs typeface="Calibri" pitchFamily="34" charset="-120"/>
-              </a:rPr>
-              <a:t>target phrases</a:t>
-            </a:r>
-            <a:endParaRPr lang="en-US" sz="900" dirty="0"/>
-          </a:p>
-        </p:txBody>
-      </p:sp>
-      <p:sp>
-        <p:nvSpPr>
-          <p:cNvPr id="18" name="Text 16"/>
-          <p:cNvSpPr/>
-          <p:nvPr/>
-        </p:nvSpPr>
-        <p:spPr>
-          <a:xfrm>
-            <a:off x="2889504" y="4590288"/>
-            <a:ext cx="1078992" cy="310896"/>
-          </a:xfrm>
-          <a:prstGeom prst="rect">
-            <a:avLst/>
-          </a:prstGeom>
-          <a:noFill/>
-          <a:ln/>
-        </p:spPr>
-        <p:txBody>
-          <a:bodyPr wrap="square" lIns="0" tIns="0" rIns="0" bIns="0" rtlCol="0" anchor="ctr"/>
-          <a:lstStyle/>
-          <a:p>
-            <a:pPr indent="0" marL="0">
-              <a:buNone/>
-            </a:pPr>
-            <a:r>
-              <a:rPr lang="en-US" sz="1900" b="1" dirty="0">
-                <a:solidFill>
-                  <a:srgbClr val="131920"/>
-                </a:solidFill>
-                <a:latin typeface="Calibri" pitchFamily="34" charset="0"/>
-                <a:ea typeface="Calibri" pitchFamily="34" charset="-122"/>
-                <a:cs typeface="Calibri" pitchFamily="34" charset="-120"/>
-              </a:rPr>
-              <a:t>32</a:t>
-            </a:r>
-            <a:endParaRPr lang="en-US" sz="1900" dirty="0"/>
-          </a:p>
-        </p:txBody>
-      </p:sp>
-      <p:sp>
-        <p:nvSpPr>
-          <p:cNvPr id="19" name="Text 17"/>
-          <p:cNvSpPr/>
-          <p:nvPr/>
-        </p:nvSpPr>
-        <p:spPr>
-          <a:xfrm>
-            <a:off x="2889504" y="4901184"/>
-            <a:ext cx="1078992" cy="420624"/>
-          </a:xfrm>
-          <a:prstGeom prst="rect">
-            <a:avLst/>
-          </a:prstGeom>
-          <a:noFill/>
-          <a:ln/>
-        </p:spPr>
-        <p:txBody>
-          <a:bodyPr wrap="square" lIns="0" tIns="0" rIns="0" bIns="0" rtlCol="0" anchor="ctr"/>
-          <a:lstStyle/>
-          <a:p>
-            <a:pPr indent="0" marL="0">
-              <a:buNone/>
-            </a:pPr>
-            <a:r>
-              <a:rPr lang="en-US" sz="900" dirty="0">
-                <a:solidFill>
-                  <a:srgbClr val="5C6773"/>
-                </a:solidFill>
-                <a:latin typeface="Calibri" pitchFamily="34" charset="0"/>
-                <a:ea typeface="Calibri" pitchFamily="34" charset="-122"/>
-                <a:cs typeface="Calibri" pitchFamily="34" charset="-120"/>
-              </a:rPr>
-              <a:t>shows, 753 episodes</a:t>
-            </a:r>
-            <a:endParaRPr lang="en-US" sz="900" dirty="0"/>
-          </a:p>
-        </p:txBody>
-      </p:sp>
-      <p:sp>
-        <p:nvSpPr>
-          <p:cNvPr id="20" name="Text 18"/>
-          <p:cNvSpPr/>
-          <p:nvPr/>
-        </p:nvSpPr>
-        <p:spPr>
-          <a:xfrm>
-            <a:off x="4370832" y="1645920"/>
-            <a:ext cx="7333488" cy="219456"/>
-          </a:xfrm>
-          <a:prstGeom prst="rect">
-            <a:avLst/>
-          </a:prstGeom>
-          <a:noFill/>
-          <a:ln/>
-        </p:spPr>
-        <p:txBody>
-          <a:bodyPr wrap="square" lIns="0" tIns="0" rIns="0" bIns="0" rtlCol="0" anchor="ctr"/>
-          <a:lstStyle/>
-          <a:p>
-            <a:pPr indent="0" marL="0">
-              <a:buNone/>
-            </a:pPr>
-            <a:r>
-              <a:rPr lang="en-US" sz="950" b="1" spc="110" kern="0" dirty="0">
-                <a:solidFill>
-                  <a:srgbClr val="0F7A84"/>
-                </a:solidFill>
-                <a:latin typeface="Calibri" pitchFamily="34" charset="0"/>
-                <a:ea typeface="Calibri" pitchFamily="34" charset="-122"/>
-                <a:cs typeface="Calibri" pitchFamily="34" charset="-120"/>
-              </a:rPr>
-              <a:t>HOW WELL EACH REPRESENTATION RECOVERS SPEAKER STANCE</a:t>
-            </a:r>
-            <a:endParaRPr lang="en-US" sz="950" dirty="0"/>
-          </a:p>
-        </p:txBody>
-      </p:sp>
-      <p:sp>
-        <p:nvSpPr>
-          <p:cNvPr id="21" name="Shape 19"/>
-          <p:cNvSpPr/>
-          <p:nvPr/>
-        </p:nvSpPr>
-        <p:spPr>
-          <a:xfrm>
-            <a:off x="6565392" y="1911096"/>
-            <a:ext cx="0" cy="1856232"/>
+          <p:cNvPr id="36" name="Shape 34"/>
+          <p:cNvSpPr/>
+          <p:nvPr/>
+        </p:nvSpPr>
+        <p:spPr>
+          <a:xfrm>
+            <a:off x="6565392" y="2843784"/>
+            <a:ext cx="0" cy="1664208"/>
           </a:xfrm>
           <a:prstGeom prst="line">
             <a:avLst/>
@@ -1653,14 +2518,14 @@
       </p:sp>
       <p:sp>
         <p:nvSpPr>
-          <p:cNvPr id="22" name="Text 20"/>
-          <p:cNvSpPr/>
-          <p:nvPr/>
-        </p:nvSpPr>
-        <p:spPr>
-          <a:xfrm>
-            <a:off x="6336792" y="3794760"/>
-            <a:ext cx="457200" cy="201168"/>
+          <p:cNvPr id="37" name="Text 35"/>
+          <p:cNvSpPr/>
+          <p:nvPr/>
+        </p:nvSpPr>
+        <p:spPr>
+          <a:xfrm>
+            <a:off x="6336792" y="4535424"/>
+            <a:ext cx="457200" cy="182880"/>
           </a:xfrm>
           <a:prstGeom prst="rect">
             <a:avLst/>
@@ -1692,14 +2557,14 @@
       </p:sp>
       <p:sp>
         <p:nvSpPr>
-          <p:cNvPr id="23" name="Shape 21"/>
-          <p:cNvSpPr/>
-          <p:nvPr/>
-        </p:nvSpPr>
-        <p:spPr>
-          <a:xfrm>
-            <a:off x="7907495" y="1911096"/>
-            <a:ext cx="0" cy="1856232"/>
+          <p:cNvPr id="38" name="Shape 36"/>
+          <p:cNvSpPr/>
+          <p:nvPr/>
+        </p:nvSpPr>
+        <p:spPr>
+          <a:xfrm>
+            <a:off x="7907495" y="2843784"/>
+            <a:ext cx="0" cy="1664208"/>
           </a:xfrm>
           <a:prstGeom prst="line">
             <a:avLst/>
@@ -1715,14 +2580,14 @@
       </p:sp>
       <p:sp>
         <p:nvSpPr>
-          <p:cNvPr id="24" name="Text 22"/>
-          <p:cNvSpPr/>
-          <p:nvPr/>
-        </p:nvSpPr>
-        <p:spPr>
-          <a:xfrm>
-            <a:off x="7678895" y="3794760"/>
-            <a:ext cx="457200" cy="201168"/>
+          <p:cNvPr id="39" name="Text 37"/>
+          <p:cNvSpPr/>
+          <p:nvPr/>
+        </p:nvSpPr>
+        <p:spPr>
+          <a:xfrm>
+            <a:off x="7678895" y="4535424"/>
+            <a:ext cx="457200" cy="182880"/>
           </a:xfrm>
           <a:prstGeom prst="rect">
             <a:avLst/>
@@ -1754,14 +2619,14 @@
       </p:sp>
       <p:sp>
         <p:nvSpPr>
-          <p:cNvPr id="25" name="Shape 23"/>
-          <p:cNvSpPr/>
-          <p:nvPr/>
-        </p:nvSpPr>
-        <p:spPr>
-          <a:xfrm>
-            <a:off x="9249598" y="1911096"/>
-            <a:ext cx="0" cy="1856232"/>
+          <p:cNvPr id="40" name="Shape 38"/>
+          <p:cNvSpPr/>
+          <p:nvPr/>
+        </p:nvSpPr>
+        <p:spPr>
+          <a:xfrm>
+            <a:off x="9249598" y="2843784"/>
+            <a:ext cx="0" cy="1664208"/>
           </a:xfrm>
           <a:prstGeom prst="line">
             <a:avLst/>
@@ -1777,14 +2642,14 @@
       </p:sp>
       <p:sp>
         <p:nvSpPr>
-          <p:cNvPr id="26" name="Text 24"/>
-          <p:cNvSpPr/>
-          <p:nvPr/>
-        </p:nvSpPr>
-        <p:spPr>
-          <a:xfrm>
-            <a:off x="9020998" y="3794760"/>
-            <a:ext cx="457200" cy="201168"/>
+          <p:cNvPr id="41" name="Text 39"/>
+          <p:cNvSpPr/>
+          <p:nvPr/>
+        </p:nvSpPr>
+        <p:spPr>
+          <a:xfrm>
+            <a:off x="9020998" y="4535424"/>
+            <a:ext cx="457200" cy="182880"/>
           </a:xfrm>
           <a:prstGeom prst="rect">
             <a:avLst/>
@@ -1816,14 +2681,14 @@
       </p:sp>
       <p:sp>
         <p:nvSpPr>
-          <p:cNvPr id="27" name="Shape 25"/>
-          <p:cNvSpPr/>
-          <p:nvPr/>
-        </p:nvSpPr>
-        <p:spPr>
-          <a:xfrm>
-            <a:off x="10591702" y="1911096"/>
-            <a:ext cx="0" cy="1856232"/>
+          <p:cNvPr id="42" name="Shape 40"/>
+          <p:cNvSpPr/>
+          <p:nvPr/>
+        </p:nvSpPr>
+        <p:spPr>
+          <a:xfrm>
+            <a:off x="10591702" y="2843784"/>
+            <a:ext cx="0" cy="1664208"/>
           </a:xfrm>
           <a:prstGeom prst="line">
             <a:avLst/>
@@ -1839,14 +2704,14 @@
       </p:sp>
       <p:sp>
         <p:nvSpPr>
-          <p:cNvPr id="28" name="Text 26"/>
-          <p:cNvSpPr/>
-          <p:nvPr/>
-        </p:nvSpPr>
-        <p:spPr>
-          <a:xfrm>
-            <a:off x="10363102" y="3794760"/>
-            <a:ext cx="457200" cy="201168"/>
+          <p:cNvPr id="43" name="Text 41"/>
+          <p:cNvSpPr/>
+          <p:nvPr/>
+        </p:nvSpPr>
+        <p:spPr>
+          <a:xfrm>
+            <a:off x="10363102" y="4535424"/>
+            <a:ext cx="457200" cy="182880"/>
           </a:xfrm>
           <a:prstGeom prst="rect">
             <a:avLst/>
@@ -1878,14 +2743,14 @@
       </p:sp>
       <p:sp>
         <p:nvSpPr>
-          <p:cNvPr id="29" name="Shape 27"/>
-          <p:cNvSpPr/>
-          <p:nvPr/>
-        </p:nvSpPr>
-        <p:spPr>
-          <a:xfrm>
-            <a:off x="8779862" y="1883664"/>
-            <a:ext cx="0" cy="1874520"/>
+          <p:cNvPr id="44" name="Shape 42"/>
+          <p:cNvSpPr/>
+          <p:nvPr/>
+        </p:nvSpPr>
+        <p:spPr>
+          <a:xfrm>
+            <a:off x="8779862" y="2816352"/>
+            <a:ext cx="0" cy="1682496"/>
           </a:xfrm>
           <a:prstGeom prst="line">
             <a:avLst/>
@@ -1901,14 +2766,14 @@
       </p:sp>
       <p:sp>
         <p:nvSpPr>
-          <p:cNvPr id="30" name="Text 28"/>
-          <p:cNvSpPr/>
-          <p:nvPr/>
-        </p:nvSpPr>
-        <p:spPr>
-          <a:xfrm>
-            <a:off x="7819742" y="4014216"/>
-            <a:ext cx="1920240" cy="219456"/>
+          <p:cNvPr id="45" name="Text 43"/>
+          <p:cNvSpPr/>
+          <p:nvPr/>
+        </p:nvSpPr>
+        <p:spPr>
+          <a:xfrm>
+            <a:off x="7819742" y="4718304"/>
+            <a:ext cx="1920240" cy="201168"/>
           </a:xfrm>
           <a:prstGeom prst="rect">
             <a:avLst/>
@@ -1924,7 +2789,7 @@
               <a:buNone/>
             </a:pPr>
             <a:r>
-              <a:rPr lang="en-US" sz="900" i="1" dirty="0">
+              <a:rPr lang="en-US" sz="850" i="1" dirty="0">
                 <a:solidFill>
                   <a:srgbClr val="B4522F"/>
                 </a:solidFill>
@@ -1934,20 +2799,20 @@
               </a:rPr>
               <a:t>chance, about 0.33</a:t>
             </a:r>
-            <a:endParaRPr lang="en-US" sz="900" dirty="0"/>
-          </a:p>
-        </p:txBody>
-      </p:sp>
-      <p:sp>
-        <p:nvSpPr>
-          <p:cNvPr id="31" name="Text 29"/>
-          <p:cNvSpPr/>
-          <p:nvPr/>
-        </p:nvSpPr>
-        <p:spPr>
-          <a:xfrm>
-            <a:off x="4370832" y="1938528"/>
-            <a:ext cx="2103120" cy="251460"/>
+            <a:endParaRPr lang="en-US" sz="850" dirty="0"/>
+          </a:p>
+        </p:txBody>
+      </p:sp>
+      <p:sp>
+        <p:nvSpPr>
+          <p:cNvPr id="46" name="Text 44"/>
+          <p:cNvSpPr/>
+          <p:nvPr/>
+        </p:nvSpPr>
+        <p:spPr>
+          <a:xfrm>
+            <a:off x="4370832" y="2871216"/>
+            <a:ext cx="2103120" cy="233172"/>
           </a:xfrm>
           <a:prstGeom prst="rect">
             <a:avLst/>
@@ -1963,7 +2828,7 @@
               <a:buNone/>
             </a:pPr>
             <a:r>
-              <a:rPr lang="en-US" sz="1050" dirty="0">
+              <a:rPr lang="en-US" sz="1000" dirty="0">
                 <a:solidFill>
                   <a:srgbClr val="131920"/>
                 </a:solidFill>
@@ -1973,20 +2838,20 @@
               </a:rPr>
               <a:t>WavLM</a:t>
             </a:r>
-            <a:endParaRPr lang="en-US" sz="1050" dirty="0"/>
-          </a:p>
-        </p:txBody>
-      </p:sp>
-      <p:sp>
-        <p:nvSpPr>
-          <p:cNvPr id="32" name="Shape 30"/>
-          <p:cNvSpPr/>
-          <p:nvPr/>
-        </p:nvSpPr>
-        <p:spPr>
-          <a:xfrm>
-            <a:off x="6565392" y="1956816"/>
-            <a:ext cx="3845126" cy="214884"/>
+            <a:endParaRPr lang="en-US" sz="1000" dirty="0"/>
+          </a:p>
+        </p:txBody>
+      </p:sp>
+      <p:sp>
+        <p:nvSpPr>
+          <p:cNvPr id="47" name="Shape 45"/>
+          <p:cNvSpPr/>
+          <p:nvPr/>
+        </p:nvSpPr>
+        <p:spPr>
+          <a:xfrm>
+            <a:off x="6565392" y="2889504"/>
+            <a:ext cx="3845126" cy="196596"/>
           </a:xfrm>
           <a:prstGeom prst="rect">
             <a:avLst/>
@@ -2004,30 +2869,30 @@
       </p:sp>
       <p:sp>
         <p:nvSpPr>
-          <p:cNvPr id="33" name="Text 31"/>
-          <p:cNvSpPr/>
-          <p:nvPr/>
-        </p:nvSpPr>
-        <p:spPr>
-          <a:xfrm>
-            <a:off x="10483670" y="1938528"/>
-            <a:ext cx="777240" cy="251460"/>
-          </a:xfrm>
-          <a:prstGeom prst="rect">
-            <a:avLst/>
-          </a:prstGeom>
-          <a:noFill/>
-          <a:ln/>
-        </p:spPr>
-        <p:txBody>
-          <a:bodyPr wrap="square" lIns="0" tIns="0" rIns="0" bIns="0" rtlCol="0" anchor="ctr"/>
-          <a:lstStyle/>
-          <a:p>
-            <a:pPr indent="0" marL="0">
-              <a:buNone/>
-            </a:pPr>
-            <a:r>
-              <a:rPr lang="en-US" sz="1050" b="1" dirty="0">
+          <p:cNvPr id="48" name="Text 46"/>
+          <p:cNvSpPr/>
+          <p:nvPr/>
+        </p:nvSpPr>
+        <p:spPr>
+          <a:xfrm>
+            <a:off x="10483670" y="2871216"/>
+            <a:ext cx="777240" cy="233172"/>
+          </a:xfrm>
+          <a:prstGeom prst="rect">
+            <a:avLst/>
+          </a:prstGeom>
+          <a:noFill/>
+          <a:ln/>
+        </p:spPr>
+        <p:txBody>
+          <a:bodyPr wrap="square" lIns="0" tIns="0" rIns="0" bIns="0" rtlCol="0" anchor="ctr"/>
+          <a:lstStyle/>
+          <a:p>
+            <a:pPr indent="0" marL="0">
+              <a:buNone/>
+            </a:pPr>
+            <a:r>
+              <a:rPr lang="en-US" sz="1000" b="1" dirty="0">
                 <a:solidFill>
                   <a:srgbClr val="131920"/>
                 </a:solidFill>
@@ -2037,20 +2902,20 @@
               </a:rPr>
               <a:t>0.573</a:t>
             </a:r>
-            <a:endParaRPr lang="en-US" sz="1050" dirty="0"/>
-          </a:p>
-        </p:txBody>
-      </p:sp>
-      <p:sp>
-        <p:nvSpPr>
-          <p:cNvPr id="34" name="Text 32"/>
-          <p:cNvSpPr/>
-          <p:nvPr/>
-        </p:nvSpPr>
-        <p:spPr>
-          <a:xfrm>
-            <a:off x="4370832" y="2244852"/>
-            <a:ext cx="2103120" cy="251460"/>
+            <a:endParaRPr lang="en-US" sz="1000" dirty="0"/>
+          </a:p>
+        </p:txBody>
+      </p:sp>
+      <p:sp>
+        <p:nvSpPr>
+          <p:cNvPr id="49" name="Text 47"/>
+          <p:cNvSpPr/>
+          <p:nvPr/>
+        </p:nvSpPr>
+        <p:spPr>
+          <a:xfrm>
+            <a:off x="4370832" y="3145536"/>
+            <a:ext cx="2103120" cy="233172"/>
           </a:xfrm>
           <a:prstGeom prst="rect">
             <a:avLst/>
@@ -2066,7 +2931,7 @@
               <a:buNone/>
             </a:pPr>
             <a:r>
-              <a:rPr lang="en-US" sz="1050" dirty="0">
+              <a:rPr lang="en-US" sz="1000" dirty="0">
                 <a:solidFill>
                   <a:srgbClr val="131920"/>
                 </a:solidFill>
@@ -2076,20 +2941,20 @@
               </a:rPr>
               <a:t>Whisper encoder</a:t>
             </a:r>
-            <a:endParaRPr lang="en-US" sz="1050" dirty="0"/>
-          </a:p>
-        </p:txBody>
-      </p:sp>
-      <p:sp>
-        <p:nvSpPr>
-          <p:cNvPr id="35" name="Shape 33"/>
-          <p:cNvSpPr/>
-          <p:nvPr/>
-        </p:nvSpPr>
-        <p:spPr>
-          <a:xfrm>
-            <a:off x="6565392" y="2263140"/>
-            <a:ext cx="3784731" cy="214884"/>
+            <a:endParaRPr lang="en-US" sz="1000" dirty="0"/>
+          </a:p>
+        </p:txBody>
+      </p:sp>
+      <p:sp>
+        <p:nvSpPr>
+          <p:cNvPr id="50" name="Shape 48"/>
+          <p:cNvSpPr/>
+          <p:nvPr/>
+        </p:nvSpPr>
+        <p:spPr>
+          <a:xfrm>
+            <a:off x="6565392" y="3163824"/>
+            <a:ext cx="3784731" cy="196596"/>
           </a:xfrm>
           <a:prstGeom prst="rect">
             <a:avLst/>
@@ -2107,30 +2972,30 @@
       </p:sp>
       <p:sp>
         <p:nvSpPr>
-          <p:cNvPr id="36" name="Text 34"/>
-          <p:cNvSpPr/>
-          <p:nvPr/>
-        </p:nvSpPr>
-        <p:spPr>
-          <a:xfrm>
-            <a:off x="10423275" y="2244852"/>
-            <a:ext cx="777240" cy="251460"/>
-          </a:xfrm>
-          <a:prstGeom prst="rect">
-            <a:avLst/>
-          </a:prstGeom>
-          <a:noFill/>
-          <a:ln/>
-        </p:spPr>
-        <p:txBody>
-          <a:bodyPr wrap="square" lIns="0" tIns="0" rIns="0" bIns="0" rtlCol="0" anchor="ctr"/>
-          <a:lstStyle/>
-          <a:p>
-            <a:pPr indent="0" marL="0">
-              <a:buNone/>
-            </a:pPr>
-            <a:r>
-              <a:rPr lang="en-US" sz="1050" b="1" dirty="0">
+          <p:cNvPr id="51" name="Text 49"/>
+          <p:cNvSpPr/>
+          <p:nvPr/>
+        </p:nvSpPr>
+        <p:spPr>
+          <a:xfrm>
+            <a:off x="10423275" y="3145536"/>
+            <a:ext cx="777240" cy="233172"/>
+          </a:xfrm>
+          <a:prstGeom prst="rect">
+            <a:avLst/>
+          </a:prstGeom>
+          <a:noFill/>
+          <a:ln/>
+        </p:spPr>
+        <p:txBody>
+          <a:bodyPr wrap="square" lIns="0" tIns="0" rIns="0" bIns="0" rtlCol="0" anchor="ctr"/>
+          <a:lstStyle/>
+          <a:p>
+            <a:pPr indent="0" marL="0">
+              <a:buNone/>
+            </a:pPr>
+            <a:r>
+              <a:rPr lang="en-US" sz="1000" b="1" dirty="0">
                 <a:solidFill>
                   <a:srgbClr val="131920"/>
                 </a:solidFill>
@@ -2140,20 +3005,20 @@
               </a:rPr>
               <a:t>0.564</a:t>
             </a:r>
-            <a:endParaRPr lang="en-US" sz="1050" dirty="0"/>
-          </a:p>
-        </p:txBody>
-      </p:sp>
-      <p:sp>
-        <p:nvSpPr>
-          <p:cNvPr id="37" name="Text 35"/>
-          <p:cNvSpPr/>
-          <p:nvPr/>
-        </p:nvSpPr>
-        <p:spPr>
-          <a:xfrm>
-            <a:off x="4370832" y="2551176"/>
-            <a:ext cx="2103120" cy="251460"/>
+            <a:endParaRPr lang="en-US" sz="1000" dirty="0"/>
+          </a:p>
+        </p:txBody>
+      </p:sp>
+      <p:sp>
+        <p:nvSpPr>
+          <p:cNvPr id="52" name="Text 50"/>
+          <p:cNvSpPr/>
+          <p:nvPr/>
+        </p:nvSpPr>
+        <p:spPr>
+          <a:xfrm>
+            <a:off x="4370832" y="3419856"/>
+            <a:ext cx="2103120" cy="233172"/>
           </a:xfrm>
           <a:prstGeom prst="rect">
             <a:avLst/>
@@ -2169,7 +3034,7 @@
               <a:buNone/>
             </a:pPr>
             <a:r>
-              <a:rPr lang="en-US" sz="1050" dirty="0">
+              <a:rPr lang="en-US" sz="1000" dirty="0">
                 <a:solidFill>
                   <a:srgbClr val="131920"/>
                 </a:solidFill>
@@ -2179,20 +3044,20 @@
               </a:rPr>
               <a:t>HuBERT</a:t>
             </a:r>
-            <a:endParaRPr lang="en-US" sz="1050" dirty="0"/>
-          </a:p>
-        </p:txBody>
-      </p:sp>
-      <p:sp>
-        <p:nvSpPr>
-          <p:cNvPr id="38" name="Shape 36"/>
-          <p:cNvSpPr/>
-          <p:nvPr/>
-        </p:nvSpPr>
-        <p:spPr>
-          <a:xfrm>
-            <a:off x="6565392" y="2569464"/>
-            <a:ext cx="3489468" cy="214884"/>
+            <a:endParaRPr lang="en-US" sz="1000" dirty="0"/>
+          </a:p>
+        </p:txBody>
+      </p:sp>
+      <p:sp>
+        <p:nvSpPr>
+          <p:cNvPr id="53" name="Shape 51"/>
+          <p:cNvSpPr/>
+          <p:nvPr/>
+        </p:nvSpPr>
+        <p:spPr>
+          <a:xfrm>
+            <a:off x="6565392" y="3438144"/>
+            <a:ext cx="3489468" cy="196596"/>
           </a:xfrm>
           <a:prstGeom prst="rect">
             <a:avLst/>
@@ -2210,30 +3075,30 @@
       </p:sp>
       <p:sp>
         <p:nvSpPr>
-          <p:cNvPr id="39" name="Text 37"/>
-          <p:cNvSpPr/>
-          <p:nvPr/>
-        </p:nvSpPr>
-        <p:spPr>
-          <a:xfrm>
-            <a:off x="10128012" y="2551176"/>
-            <a:ext cx="777240" cy="251460"/>
-          </a:xfrm>
-          <a:prstGeom prst="rect">
-            <a:avLst/>
-          </a:prstGeom>
-          <a:noFill/>
-          <a:ln/>
-        </p:spPr>
-        <p:txBody>
-          <a:bodyPr wrap="square" lIns="0" tIns="0" rIns="0" bIns="0" rtlCol="0" anchor="ctr"/>
-          <a:lstStyle/>
-          <a:p>
-            <a:pPr indent="0" marL="0">
-              <a:buNone/>
-            </a:pPr>
-            <a:r>
-              <a:rPr lang="en-US" sz="1050" b="1" dirty="0">
+          <p:cNvPr id="54" name="Text 52"/>
+          <p:cNvSpPr/>
+          <p:nvPr/>
+        </p:nvSpPr>
+        <p:spPr>
+          <a:xfrm>
+            <a:off x="10128012" y="3419856"/>
+            <a:ext cx="777240" cy="233172"/>
+          </a:xfrm>
+          <a:prstGeom prst="rect">
+            <a:avLst/>
+          </a:prstGeom>
+          <a:noFill/>
+          <a:ln/>
+        </p:spPr>
+        <p:txBody>
+          <a:bodyPr wrap="square" lIns="0" tIns="0" rIns="0" bIns="0" rtlCol="0" anchor="ctr"/>
+          <a:lstStyle/>
+          <a:p>
+            <a:pPr indent="0" marL="0">
+              <a:buNone/>
+            </a:pPr>
+            <a:r>
+              <a:rPr lang="en-US" sz="1000" b="1" dirty="0">
                 <a:solidFill>
                   <a:srgbClr val="131920"/>
                 </a:solidFill>
@@ -2243,20 +3108,20 @@
               </a:rPr>
               <a:t>0.520</a:t>
             </a:r>
-            <a:endParaRPr lang="en-US" sz="1050" dirty="0"/>
-          </a:p>
-        </p:txBody>
-      </p:sp>
-      <p:sp>
-        <p:nvSpPr>
-          <p:cNvPr id="40" name="Text 38"/>
-          <p:cNvSpPr/>
-          <p:nvPr/>
-        </p:nvSpPr>
-        <p:spPr>
-          <a:xfrm>
-            <a:off x="4370832" y="2857500"/>
-            <a:ext cx="2103120" cy="251460"/>
+            <a:endParaRPr lang="en-US" sz="1000" dirty="0"/>
+          </a:p>
+        </p:txBody>
+      </p:sp>
+      <p:sp>
+        <p:nvSpPr>
+          <p:cNvPr id="55" name="Text 53"/>
+          <p:cNvSpPr/>
+          <p:nvPr/>
+        </p:nvSpPr>
+        <p:spPr>
+          <a:xfrm>
+            <a:off x="4370832" y="3694176"/>
+            <a:ext cx="2103120" cy="233172"/>
           </a:xfrm>
           <a:prstGeom prst="rect">
             <a:avLst/>
@@ -2272,7 +3137,7 @@
               <a:buNone/>
             </a:pPr>
             <a:r>
-              <a:rPr lang="en-US" sz="1050" dirty="0">
+              <a:rPr lang="en-US" sz="1000" dirty="0">
                 <a:solidFill>
                   <a:srgbClr val="131920"/>
                 </a:solidFill>
@@ -2282,20 +3147,20 @@
               </a:rPr>
               <a:t>Text, word only</a:t>
             </a:r>
-            <a:endParaRPr lang="en-US" sz="1050" dirty="0"/>
-          </a:p>
-        </p:txBody>
-      </p:sp>
-      <p:sp>
-        <p:nvSpPr>
-          <p:cNvPr id="41" name="Shape 39"/>
-          <p:cNvSpPr/>
-          <p:nvPr/>
-        </p:nvSpPr>
-        <p:spPr>
-          <a:xfrm>
-            <a:off x="6565392" y="2875788"/>
-            <a:ext cx="3268021" cy="214884"/>
+            <a:endParaRPr lang="en-US" sz="1000" dirty="0"/>
+          </a:p>
+        </p:txBody>
+      </p:sp>
+      <p:sp>
+        <p:nvSpPr>
+          <p:cNvPr id="56" name="Shape 54"/>
+          <p:cNvSpPr/>
+          <p:nvPr/>
+        </p:nvSpPr>
+        <p:spPr>
+          <a:xfrm>
+            <a:off x="6565392" y="3712464"/>
+            <a:ext cx="3268021" cy="196596"/>
           </a:xfrm>
           <a:prstGeom prst="rect">
             <a:avLst/>
@@ -2313,30 +3178,30 @@
       </p:sp>
       <p:sp>
         <p:nvSpPr>
-          <p:cNvPr id="42" name="Text 40"/>
-          <p:cNvSpPr/>
-          <p:nvPr/>
-        </p:nvSpPr>
-        <p:spPr>
-          <a:xfrm>
-            <a:off x="9906565" y="2857500"/>
-            <a:ext cx="777240" cy="251460"/>
-          </a:xfrm>
-          <a:prstGeom prst="rect">
-            <a:avLst/>
-          </a:prstGeom>
-          <a:noFill/>
-          <a:ln/>
-        </p:spPr>
-        <p:txBody>
-          <a:bodyPr wrap="square" lIns="0" tIns="0" rIns="0" bIns="0" rtlCol="0" anchor="ctr"/>
-          <a:lstStyle/>
-          <a:p>
-            <a:pPr indent="0" marL="0">
-              <a:buNone/>
-            </a:pPr>
-            <a:r>
-              <a:rPr lang="en-US" sz="1050" b="1" dirty="0">
+          <p:cNvPr id="57" name="Text 55"/>
+          <p:cNvSpPr/>
+          <p:nvPr/>
+        </p:nvSpPr>
+        <p:spPr>
+          <a:xfrm>
+            <a:off x="9906565" y="3694176"/>
+            <a:ext cx="777240" cy="233172"/>
+          </a:xfrm>
+          <a:prstGeom prst="rect">
+            <a:avLst/>
+          </a:prstGeom>
+          <a:noFill/>
+          <a:ln/>
+        </p:spPr>
+        <p:txBody>
+          <a:bodyPr wrap="square" lIns="0" tIns="0" rIns="0" bIns="0" rtlCol="0" anchor="ctr"/>
+          <a:lstStyle/>
+          <a:p>
+            <a:pPr indent="0" marL="0">
+              <a:buNone/>
+            </a:pPr>
+            <a:r>
+              <a:rPr lang="en-US" sz="1000" b="1" dirty="0">
                 <a:solidFill>
                   <a:srgbClr val="131920"/>
                 </a:solidFill>
@@ -2346,20 +3211,20 @@
               </a:rPr>
               <a:t>0.487</a:t>
             </a:r>
-            <a:endParaRPr lang="en-US" sz="1050" dirty="0"/>
-          </a:p>
-        </p:txBody>
-      </p:sp>
-      <p:sp>
-        <p:nvSpPr>
-          <p:cNvPr id="43" name="Text 41"/>
-          <p:cNvSpPr/>
-          <p:nvPr/>
-        </p:nvSpPr>
-        <p:spPr>
-          <a:xfrm>
-            <a:off x="4370832" y="3163824"/>
-            <a:ext cx="2103120" cy="251460"/>
+            <a:endParaRPr lang="en-US" sz="1000" dirty="0"/>
+          </a:p>
+        </p:txBody>
+      </p:sp>
+      <p:sp>
+        <p:nvSpPr>
+          <p:cNvPr id="58" name="Text 56"/>
+          <p:cNvSpPr/>
+          <p:nvPr/>
+        </p:nvSpPr>
+        <p:spPr>
+          <a:xfrm>
+            <a:off x="4370832" y="3968496"/>
+            <a:ext cx="2103120" cy="233172"/>
           </a:xfrm>
           <a:prstGeom prst="rect">
             <a:avLst/>
@@ -2375,7 +3240,7 @@
               <a:buNone/>
             </a:pPr>
             <a:r>
-              <a:rPr lang="en-US" sz="1050" b="1" dirty="0">
+              <a:rPr lang="en-US" sz="1000" b="1" dirty="0">
                 <a:solidFill>
                   <a:srgbClr val="B4522F"/>
                 </a:solidFill>
@@ -2385,20 +3250,20 @@
               </a:rPr>
               <a:t>Mimi, deployed tokeniser</a:t>
             </a:r>
-            <a:endParaRPr lang="en-US" sz="1050" dirty="0"/>
-          </a:p>
-        </p:txBody>
-      </p:sp>
-      <p:sp>
-        <p:nvSpPr>
-          <p:cNvPr id="44" name="Shape 42"/>
-          <p:cNvSpPr/>
-          <p:nvPr/>
-        </p:nvSpPr>
-        <p:spPr>
-          <a:xfrm>
-            <a:off x="6565392" y="3182112"/>
-            <a:ext cx="2556707" cy="214884"/>
+            <a:endParaRPr lang="en-US" sz="1000" dirty="0"/>
+          </a:p>
+        </p:txBody>
+      </p:sp>
+      <p:sp>
+        <p:nvSpPr>
+          <p:cNvPr id="59" name="Shape 57"/>
+          <p:cNvSpPr/>
+          <p:nvPr/>
+        </p:nvSpPr>
+        <p:spPr>
+          <a:xfrm>
+            <a:off x="6565392" y="3986784"/>
+            <a:ext cx="2556707" cy="196596"/>
           </a:xfrm>
           <a:prstGeom prst="rect">
             <a:avLst/>
@@ -2416,30 +3281,30 @@
       </p:sp>
       <p:sp>
         <p:nvSpPr>
-          <p:cNvPr id="45" name="Text 43"/>
-          <p:cNvSpPr/>
-          <p:nvPr/>
-        </p:nvSpPr>
-        <p:spPr>
-          <a:xfrm>
-            <a:off x="9195251" y="3163824"/>
-            <a:ext cx="777240" cy="251460"/>
-          </a:xfrm>
-          <a:prstGeom prst="rect">
-            <a:avLst/>
-          </a:prstGeom>
-          <a:noFill/>
-          <a:ln/>
-        </p:spPr>
-        <p:txBody>
-          <a:bodyPr wrap="square" lIns="0" tIns="0" rIns="0" bIns="0" rtlCol="0" anchor="ctr"/>
-          <a:lstStyle/>
-          <a:p>
-            <a:pPr indent="0" marL="0">
-              <a:buNone/>
-            </a:pPr>
-            <a:r>
-              <a:rPr lang="en-US" sz="1050" b="1" dirty="0">
+          <p:cNvPr id="60" name="Text 58"/>
+          <p:cNvSpPr/>
+          <p:nvPr/>
+        </p:nvSpPr>
+        <p:spPr>
+          <a:xfrm>
+            <a:off x="9195251" y="3968496"/>
+            <a:ext cx="777240" cy="233172"/>
+          </a:xfrm>
+          <a:prstGeom prst="rect">
+            <a:avLst/>
+          </a:prstGeom>
+          <a:noFill/>
+          <a:ln/>
+        </p:spPr>
+        <p:txBody>
+          <a:bodyPr wrap="square" lIns="0" tIns="0" rIns="0" bIns="0" rtlCol="0" anchor="ctr"/>
+          <a:lstStyle/>
+          <a:p>
+            <a:pPr indent="0" marL="0">
+              <a:buNone/>
+            </a:pPr>
+            <a:r>
+              <a:rPr lang="en-US" sz="1000" b="1" dirty="0">
                 <a:solidFill>
                   <a:srgbClr val="B4522F"/>
                 </a:solidFill>
@@ -2449,20 +3314,20 @@
               </a:rPr>
               <a:t>0.381</a:t>
             </a:r>
-            <a:endParaRPr lang="en-US" sz="1050" dirty="0"/>
-          </a:p>
-        </p:txBody>
-      </p:sp>
-      <p:sp>
-        <p:nvSpPr>
-          <p:cNvPr id="46" name="Text 44"/>
-          <p:cNvSpPr/>
-          <p:nvPr/>
-        </p:nvSpPr>
-        <p:spPr>
-          <a:xfrm>
-            <a:off x="4370832" y="3470148"/>
-            <a:ext cx="2103120" cy="251460"/>
+            <a:endParaRPr lang="en-US" sz="1000" dirty="0"/>
+          </a:p>
+        </p:txBody>
+      </p:sp>
+      <p:sp>
+        <p:nvSpPr>
+          <p:cNvPr id="61" name="Text 59"/>
+          <p:cNvSpPr/>
+          <p:nvPr/>
+        </p:nvSpPr>
+        <p:spPr>
+          <a:xfrm>
+            <a:off x="4370832" y="4242816"/>
+            <a:ext cx="2103120" cy="233172"/>
           </a:xfrm>
           <a:prstGeom prst="rect">
             <a:avLst/>
@@ -2478,7 +3343,7 @@
               <a:buNone/>
             </a:pPr>
             <a:r>
-              <a:rPr lang="en-US" sz="1050" dirty="0">
+              <a:rPr lang="en-US" sz="1000" dirty="0">
                 <a:solidFill>
                   <a:srgbClr val="131920"/>
                 </a:solidFill>
@@ -2488,20 +3353,20 @@
               </a:rPr>
               <a:t>Text, with context</a:t>
             </a:r>
-            <a:endParaRPr lang="en-US" sz="1050" dirty="0"/>
-          </a:p>
-        </p:txBody>
-      </p:sp>
-      <p:sp>
-        <p:nvSpPr>
-          <p:cNvPr id="47" name="Shape 45"/>
-          <p:cNvSpPr/>
-          <p:nvPr/>
-        </p:nvSpPr>
-        <p:spPr>
-          <a:xfrm>
-            <a:off x="6565392" y="3488436"/>
-            <a:ext cx="2536575" cy="214884"/>
+            <a:endParaRPr lang="en-US" sz="1000" dirty="0"/>
+          </a:p>
+        </p:txBody>
+      </p:sp>
+      <p:sp>
+        <p:nvSpPr>
+          <p:cNvPr id="62" name="Shape 60"/>
+          <p:cNvSpPr/>
+          <p:nvPr/>
+        </p:nvSpPr>
+        <p:spPr>
+          <a:xfrm>
+            <a:off x="6565392" y="4261104"/>
+            <a:ext cx="2536575" cy="196596"/>
           </a:xfrm>
           <a:prstGeom prst="rect">
             <a:avLst/>
@@ -2519,30 +3384,30 @@
       </p:sp>
       <p:sp>
         <p:nvSpPr>
-          <p:cNvPr id="48" name="Text 46"/>
-          <p:cNvSpPr/>
-          <p:nvPr/>
-        </p:nvSpPr>
-        <p:spPr>
-          <a:xfrm>
-            <a:off x="9175119" y="3470148"/>
-            <a:ext cx="777240" cy="251460"/>
-          </a:xfrm>
-          <a:prstGeom prst="rect">
-            <a:avLst/>
-          </a:prstGeom>
-          <a:noFill/>
-          <a:ln/>
-        </p:spPr>
-        <p:txBody>
-          <a:bodyPr wrap="square" lIns="0" tIns="0" rIns="0" bIns="0" rtlCol="0" anchor="ctr"/>
-          <a:lstStyle/>
-          <a:p>
-            <a:pPr indent="0" marL="0">
-              <a:buNone/>
-            </a:pPr>
-            <a:r>
-              <a:rPr lang="en-US" sz="1050" b="1" dirty="0">
+          <p:cNvPr id="63" name="Text 61"/>
+          <p:cNvSpPr/>
+          <p:nvPr/>
+        </p:nvSpPr>
+        <p:spPr>
+          <a:xfrm>
+            <a:off x="9175119" y="4242816"/>
+            <a:ext cx="777240" cy="233172"/>
+          </a:xfrm>
+          <a:prstGeom prst="rect">
+            <a:avLst/>
+          </a:prstGeom>
+          <a:noFill/>
+          <a:ln/>
+        </p:spPr>
+        <p:txBody>
+          <a:bodyPr wrap="square" lIns="0" tIns="0" rIns="0" bIns="0" rtlCol="0" anchor="ctr"/>
+          <a:lstStyle/>
+          <a:p>
+            <a:pPr indent="0" marL="0">
+              <a:buNone/>
+            </a:pPr>
+            <a:r>
+              <a:rPr lang="en-US" sz="1000" b="1" dirty="0">
                 <a:solidFill>
                   <a:srgbClr val="131920"/>
                 </a:solidFill>
@@ -2552,24 +3417,24 @@
               </a:rPr>
               <a:t>0.378</a:t>
             </a:r>
-            <a:endParaRPr lang="en-US" sz="1050" dirty="0"/>
-          </a:p>
-        </p:txBody>
-      </p:sp>
-      <p:sp>
-        <p:nvSpPr>
-          <p:cNvPr id="49" name="Shape 47"/>
-          <p:cNvSpPr/>
-          <p:nvPr/>
-        </p:nvSpPr>
-        <p:spPr>
-          <a:xfrm>
-            <a:off x="4370832" y="4434840"/>
-            <a:ext cx="7333488" cy="804672"/>
+            <a:endParaRPr lang="en-US" sz="1000" dirty="0"/>
+          </a:p>
+        </p:txBody>
+      </p:sp>
+      <p:sp>
+        <p:nvSpPr>
+          <p:cNvPr id="64" name="Shape 62"/>
+          <p:cNvSpPr/>
+          <p:nvPr/>
+        </p:nvSpPr>
+        <p:spPr>
+          <a:xfrm>
+            <a:off x="4370832" y="4992624"/>
+            <a:ext cx="7333488" cy="768096"/>
           </a:xfrm>
           <a:prstGeom prst="roundRect">
             <a:avLst>
-              <a:gd name="adj" fmla="val 5682"/>
+              <a:gd name="adj" fmla="val 5952"/>
             </a:avLst>
           </a:prstGeom>
           <a:solidFill>
@@ -2585,14 +3450,14 @@
       </p:sp>
       <p:sp>
         <p:nvSpPr>
-          <p:cNvPr id="50" name="Text 48"/>
-          <p:cNvSpPr/>
-          <p:nvPr/>
-        </p:nvSpPr>
-        <p:spPr>
-          <a:xfrm>
-            <a:off x="4517136" y="4517136"/>
-            <a:ext cx="7040880" cy="640080"/>
+          <p:cNvPr id="65" name="Text 63"/>
+          <p:cNvSpPr/>
+          <p:nvPr/>
+        </p:nvSpPr>
+        <p:spPr>
+          <a:xfrm>
+            <a:off x="4517136" y="5065776"/>
+            <a:ext cx="7040880" cy="621792"/>
           </a:xfrm>
           <a:prstGeom prst="rect">
             <a:avLst/>
@@ -2606,12 +3471,12 @@
           <a:p>
             <a:pPr indent="0" marL="0">
               <a:lnSpc>
-                <a:spcPct val="110000"/>
+                <a:spcPct val="108000"/>
               </a:lnSpc>
               <a:buNone/>
             </a:pPr>
             <a:r>
-              <a:rPr lang="en-US" sz="1050" b="1" dirty="0">
+              <a:rPr lang="en-US" sz="1000" b="1" dirty="0">
                 <a:solidFill>
                   <a:srgbClr val="131920"/>
                 </a:solidFill>
@@ -2623,12 +3488,12 @@
             </a:r>
             <a:pPr indent="0" marL="0">
               <a:lnSpc>
-                <a:spcPct val="110000"/>
+                <a:spcPct val="108000"/>
               </a:lnSpc>
               <a:buNone/>
             </a:pPr>
             <a:r>
-              <a:rPr lang="en-US" sz="1050" dirty="0">
+              <a:rPr lang="en-US" sz="1000" dirty="0">
                 <a:solidFill>
                   <a:srgbClr val="5C6773"/>
                 </a:solidFill>
@@ -2638,77 +3503,24 @@
               </a:rPr>
               <a:t>Each bar is how accurately a simple classifier recovers the speaker's stance (affiliative, neutral or adversarial) from that representation alone, scored by macro-F1. Higher means more of the meaning survived. The dashed line is chance, the score the same probe reaches when the labels are shuffled, so the distance beyond it is the signal.</a:t>
             </a:r>
-            <a:endParaRPr lang="en-US" sz="1050" dirty="0"/>
-          </a:p>
-        </p:txBody>
-      </p:sp>
-      <p:sp>
-        <p:nvSpPr>
-          <p:cNvPr id="51" name="Text 49"/>
-          <p:cNvSpPr/>
-          <p:nvPr/>
-        </p:nvSpPr>
-        <p:spPr>
-          <a:xfrm>
-            <a:off x="4370832" y="5330952"/>
-            <a:ext cx="7333488" cy="329184"/>
-          </a:xfrm>
-          <a:prstGeom prst="rect">
-            <a:avLst/>
-          </a:prstGeom>
-          <a:noFill/>
-          <a:ln/>
-        </p:spPr>
-        <p:txBody>
-          <a:bodyPr wrap="square" lIns="0" tIns="0" rIns="0" bIns="0" rtlCol="0" anchor="ctr"/>
-          <a:lstStyle/>
-          <a:p>
-            <a:pPr indent="0" marL="0">
-              <a:buNone/>
-            </a:pPr>
-            <a:r>
-              <a:rPr lang="en-US" sz="1050" b="1" dirty="0">
-                <a:solidFill>
-                  <a:srgbClr val="131920"/>
-                </a:solidFill>
-                <a:latin typeface="Calibri" pitchFamily="34" charset="0"/>
-                <a:ea typeface="Calibri" pitchFamily="34" charset="-122"/>
-                <a:cs typeface="Calibri" pitchFamily="34" charset="-120"/>
-              </a:rPr>
-              <a:t>Word held constant.   </a:t>
-            </a:r>
-            <a:pPr indent="0" marL="0">
-              <a:buNone/>
-            </a:pPr>
-            <a:r>
-              <a:rPr lang="en-US" sz="1050" dirty="0">
-                <a:solidFill>
-                  <a:srgbClr val="5C6773"/>
-                </a:solidFill>
-                <a:latin typeface="Calibri" pitchFamily="34" charset="0"/>
-                <a:ea typeface="Calibri" pitchFamily="34" charset="-122"/>
-                <a:cs typeface="Calibri" pitchFamily="34" charset="-120"/>
-              </a:rPr>
-              <a:t>Averaged within each of the eight phrases, WavLM scores 0.659 against 0.534 for text, so the contrast survives even when the word itself cannot help.</a:t>
-            </a:r>
-            <a:endParaRPr lang="en-US" sz="1050" dirty="0"/>
-          </a:p>
-        </p:txBody>
-      </p:sp>
-      <p:sp>
-        <p:nvSpPr>
-          <p:cNvPr id="52" name="Shape 50"/>
-          <p:cNvSpPr/>
-          <p:nvPr/>
-        </p:nvSpPr>
-        <p:spPr>
-          <a:xfrm>
-            <a:off x="457200" y="5779008"/>
-            <a:ext cx="11247120" cy="658368"/>
+            <a:endParaRPr lang="en-US" sz="1000" dirty="0"/>
+          </a:p>
+        </p:txBody>
+      </p:sp>
+      <p:sp>
+        <p:nvSpPr>
+          <p:cNvPr id="66" name="Shape 64"/>
+          <p:cNvSpPr/>
+          <p:nvPr/>
+        </p:nvSpPr>
+        <p:spPr>
+          <a:xfrm>
+            <a:off x="457200" y="5888736"/>
+            <a:ext cx="11247120" cy="640080"/>
           </a:xfrm>
           <a:prstGeom prst="roundRect">
             <a:avLst>
-              <a:gd name="adj" fmla="val 8333"/>
+              <a:gd name="adj" fmla="val 8571"/>
             </a:avLst>
           </a:prstGeom>
           <a:solidFill>
@@ -2724,30 +3536,33 @@
       </p:sp>
       <p:sp>
         <p:nvSpPr>
-          <p:cNvPr id="53" name="Text 51"/>
-          <p:cNvSpPr/>
-          <p:nvPr/>
-        </p:nvSpPr>
-        <p:spPr>
-          <a:xfrm>
-            <a:off x="658368" y="5897880"/>
-            <a:ext cx="10881360" cy="438912"/>
-          </a:xfrm>
-          <a:prstGeom prst="rect">
-            <a:avLst/>
-          </a:prstGeom>
-          <a:noFill/>
-          <a:ln/>
-        </p:spPr>
-        <p:txBody>
-          <a:bodyPr wrap="square" lIns="0" tIns="0" rIns="0" bIns="0" rtlCol="0" anchor="ctr"/>
-          <a:lstStyle/>
-          <a:p>
-            <a:pPr indent="0" marL="0">
-              <a:buNone/>
-            </a:pPr>
-            <a:r>
-              <a:rPr lang="en-US" sz="1200" b="1" dirty="0">
+          <p:cNvPr id="67" name="Text 65"/>
+          <p:cNvSpPr/>
+          <p:nvPr/>
+        </p:nvSpPr>
+        <p:spPr>
+          <a:xfrm>
+            <a:off x="658368" y="5980176"/>
+            <a:ext cx="10881360" cy="475488"/>
+          </a:xfrm>
+          <a:prstGeom prst="rect">
+            <a:avLst/>
+          </a:prstGeom>
+          <a:noFill/>
+          <a:ln/>
+        </p:spPr>
+        <p:txBody>
+          <a:bodyPr wrap="square" lIns="0" tIns="0" rIns="0" bIns="0" rtlCol="0" anchor="ctr"/>
+          <a:lstStyle/>
+          <a:p>
+            <a:pPr indent="0" marL="0">
+              <a:lnSpc>
+                <a:spcPct val="105000"/>
+              </a:lnSpc>
+              <a:buNone/>
+            </a:pPr>
+            <a:r>
+              <a:rPr lang="en-US" sz="1150" b="1" dirty="0">
                 <a:solidFill>
                   <a:srgbClr val="0F7A84"/>
                 </a:solidFill>
@@ -2758,10 +3573,13 @@
               <a:t>Finding.   </a:t>
             </a:r>
             <a:pPr indent="0" marL="0">
-              <a:buNone/>
-            </a:pPr>
-            <a:r>
-              <a:rPr lang="en-US" sz="1200" dirty="0">
+              <a:lnSpc>
+                <a:spcPct val="105000"/>
+              </a:lnSpc>
+              <a:buNone/>
+            </a:pPr>
+            <a:r>
+              <a:rPr lang="en-US" sz="1150" dirty="0">
                 <a:solidFill>
                   <a:srgbClr val="131920"/>
                 </a:solidFill>
@@ -2769,9 +3587,9 @@
                 <a:ea typeface="Calibri" pitchFamily="34" charset="-122"/>
                 <a:cs typeface="Calibri" pitchFamily="34" charset="-120"/>
               </a:rPr>
-              <a:t>Continuous representations preserve pragmatic stance, and it holds at matched arousal and on speakers the probe never trained on. The discrete tokens deployed systems actually consume sit barely above chance, retaining very little of it.</a:t>
-            </a:r>
-            <a:endParaRPr lang="en-US" sz="1200" dirty="0"/>
+              <a:t>Continuous representations preserve pragmatic stance, and it holds at matched arousal, on speakers the probe never trained on, and within each word, where WavLM reaches 0.659 against 0.534 for text. The discrete tokens deployed systems actually consume sit barely above chance.</a:t>
+            </a:r>
+            <a:endParaRPr lang="en-US" sz="1150" dirty="0"/>
           </a:p>
         </p:txBody>
       </p:sp>

--- a/docs/advisory_slide.pptx
+++ b/docs/advisory_slide.pptx
@@ -1006,7 +1006,7 @@
                 <a:ea typeface="Calibri" pitchFamily="34" charset="-122"/>
                 <a:cs typeface="Calibri" pitchFamily="34" charset="-120"/>
               </a:rPr>
-              <a:t>MSc Computational Linguistics, UCL   |   Track A, Pragmatic Contrast Preservation   |   Advisory group, July 2026</a:t>
+              <a:t>MA Computational Linguistics   |   UCL   |   C. Swartz   |   July 2026</a:t>
             </a:r>
             <a:endParaRPr lang="en-US" sz="950" dirty="0"/>
           </a:p>
@@ -3429,12 +3429,12 @@
         </p:nvSpPr>
         <p:spPr>
           <a:xfrm>
-            <a:off x="4370832" y="4992624"/>
-            <a:ext cx="7333488" cy="768096"/>
+            <a:off x="4370832" y="4974336"/>
+            <a:ext cx="3566160" cy="914400"/>
           </a:xfrm>
           <a:prstGeom prst="roundRect">
             <a:avLst>
-              <a:gd name="adj" fmla="val 5952"/>
+              <a:gd name="adj" fmla="val 5000"/>
             </a:avLst>
           </a:prstGeom>
           <a:solidFill>
@@ -3450,14 +3450,41 @@
       </p:sp>
       <p:sp>
         <p:nvSpPr>
-          <p:cNvPr id="65" name="Text 63"/>
-          <p:cNvSpPr/>
-          <p:nvPr/>
-        </p:nvSpPr>
-        <p:spPr>
-          <a:xfrm>
-            <a:off x="4517136" y="5065776"/>
-            <a:ext cx="7040880" cy="621792"/>
+          <p:cNvPr id="65" name="Shape 63"/>
+          <p:cNvSpPr/>
+          <p:nvPr/>
+        </p:nvSpPr>
+        <p:spPr>
+          <a:xfrm>
+            <a:off x="8138160" y="4974336"/>
+            <a:ext cx="3566160" cy="914400"/>
+          </a:xfrm>
+          <a:prstGeom prst="roundRect">
+            <a:avLst>
+              <a:gd name="adj" fmla="val 5000"/>
+            </a:avLst>
+          </a:prstGeom>
+          <a:solidFill>
+            <a:srgbClr val="FFFFFF"/>
+          </a:solidFill>
+          <a:ln w="9525">
+            <a:solidFill>
+              <a:srgbClr val="DDE1E7"/>
+            </a:solidFill>
+            <a:prstDash val="solid"/>
+          </a:ln>
+        </p:spPr>
+      </p:sp>
+      <p:sp>
+        <p:nvSpPr>
+          <p:cNvPr id="66" name="Text 64"/>
+          <p:cNvSpPr/>
+          <p:nvPr/>
+        </p:nvSpPr>
+        <p:spPr>
+          <a:xfrm>
+            <a:off x="4507992" y="5047488"/>
+            <a:ext cx="3291840" cy="768096"/>
           </a:xfrm>
           <a:prstGeom prst="rect">
             <a:avLst/>
@@ -3471,12 +3498,12 @@
           <a:p>
             <a:pPr indent="0" marL="0">
               <a:lnSpc>
-                <a:spcPct val="108000"/>
+                <a:spcPct val="106000"/>
               </a:lnSpc>
               <a:buNone/>
             </a:pPr>
             <a:r>
-              <a:rPr lang="en-US" sz="1000" b="1" dirty="0">
+              <a:rPr lang="en-US" sz="900" b="1" dirty="0">
                 <a:solidFill>
                   <a:srgbClr val="131920"/>
                 </a:solidFill>
@@ -3484,16 +3511,16 @@
                 <a:ea typeface="Calibri" pitchFamily="34" charset="-122"/>
                 <a:cs typeface="Calibri" pitchFamily="34" charset="-120"/>
               </a:rPr>
-              <a:t>How to read this.   </a:t>
+              <a:t>How to read this.  </a:t>
             </a:r>
             <a:pPr indent="0" marL="0">
               <a:lnSpc>
-                <a:spcPct val="108000"/>
+                <a:spcPct val="106000"/>
               </a:lnSpc>
               <a:buNone/>
             </a:pPr>
             <a:r>
-              <a:rPr lang="en-US" sz="1000" dirty="0">
+              <a:rPr lang="en-US" sz="900" dirty="0">
                 <a:solidFill>
                   <a:srgbClr val="5C6773"/>
                 </a:solidFill>
@@ -3501,21 +3528,250 @@
                 <a:ea typeface="Calibri" pitchFamily="34" charset="-122"/>
                 <a:cs typeface="Calibri" pitchFamily="34" charset="-120"/>
               </a:rPr>
-              <a:t>Each bar is how accurately a simple classifier recovers the speaker's stance (affiliative, neutral or adversarial) from that representation alone, scored by macro-F1. Higher means more of the meaning survived. The dashed line is chance, the score the same probe reaches when the labels are shuffled, so the distance beyond it is the signal.</a:t>
-            </a:r>
-            <a:endParaRPr lang="en-US" sz="1000" dirty="0"/>
-          </a:p>
-        </p:txBody>
-      </p:sp>
-      <p:sp>
-        <p:nvSpPr>
-          <p:cNvPr id="66" name="Shape 64"/>
-          <p:cNvSpPr/>
-          <p:nvPr/>
-        </p:nvSpPr>
-        <p:spPr>
-          <a:xfrm>
-            <a:off x="457200" y="5888736"/>
+              <a:t>Each bar is how accurately a simple classifier recovers the speaker's stance (affiliative, neutral or adversarial) from that representation alone, scored by macro-F1. The dashed line is chance, the score the same probe reaches on shuffled labels, so the distance beyond it is the signal.</a:t>
+            </a:r>
+            <a:endParaRPr lang="en-US" sz="900" dirty="0"/>
+          </a:p>
+        </p:txBody>
+      </p:sp>
+      <p:sp>
+        <p:nvSpPr>
+          <p:cNvPr id="67" name="Text 65"/>
+          <p:cNvSpPr/>
+          <p:nvPr/>
+        </p:nvSpPr>
+        <p:spPr>
+          <a:xfrm>
+            <a:off x="8275320" y="5047488"/>
+            <a:ext cx="3291840" cy="768096"/>
+          </a:xfrm>
+          <a:prstGeom prst="rect">
+            <a:avLst/>
+          </a:prstGeom>
+          <a:noFill/>
+          <a:ln/>
+        </p:spPr>
+        <p:txBody>
+          <a:bodyPr wrap="square" lIns="0" tIns="0" rIns="0" bIns="0" rtlCol="0" anchor="ctr"/>
+          <a:lstStyle/>
+          <a:p>
+            <a:pPr indent="0" marL="0">
+              <a:lnSpc>
+                <a:spcPct val="106000"/>
+              </a:lnSpc>
+              <a:buNone/>
+            </a:pPr>
+            <a:r>
+              <a:rPr lang="en-US" sz="900" b="1" dirty="0">
+                <a:solidFill>
+                  <a:srgbClr val="131920"/>
+                </a:solidFill>
+                <a:latin typeface="Calibri" pitchFamily="34" charset="0"/>
+                <a:ea typeface="Calibri" pitchFamily="34" charset="-122"/>
+                <a:cs typeface="Calibri" pitchFamily="34" charset="-120"/>
+              </a:rPr>
+              <a:t>Why these five.  </a:t>
+            </a:r>
+            <a:pPr indent="0" marL="0">
+              <a:lnSpc>
+                <a:spcPct val="106000"/>
+              </a:lnSpc>
+              <a:buNone/>
+            </a:pPr>
+            <a:r>
+              <a:rPr lang="en-US" sz="900" dirty="0">
+                <a:solidFill>
+                  <a:srgbClr val="5C6773"/>
+                </a:solidFill>
+                <a:latin typeface="Calibri" pitchFamily="34" charset="0"/>
+                <a:ea typeface="Calibri" pitchFamily="34" charset="-122"/>
+                <a:cs typeface="Calibri" pitchFamily="34" charset="-120"/>
+              </a:rPr>
+              <a:t>Each pair isolates one variable. </a:t>
+            </a:r>
+            <a:pPr indent="0" marL="0">
+              <a:lnSpc>
+                <a:spcPct val="106000"/>
+              </a:lnSpc>
+              <a:buNone/>
+            </a:pPr>
+            <a:r>
+              <a:rPr lang="en-US" sz="900" b="1" dirty="0">
+                <a:solidFill>
+                  <a:srgbClr val="0F7A84"/>
+                </a:solidFill>
+                <a:latin typeface="Calibri" pitchFamily="34" charset="0"/>
+                <a:ea typeface="Calibri" pitchFamily="34" charset="-122"/>
+                <a:cs typeface="Calibri" pitchFamily="34" charset="-120"/>
+              </a:rPr>
+              <a:t>WavLM</a:t>
+            </a:r>
+            <a:pPr indent="0" marL="0">
+              <a:lnSpc>
+                <a:spcPct val="106000"/>
+              </a:lnSpc>
+              <a:buNone/>
+            </a:pPr>
+            <a:r>
+              <a:rPr lang="en-US" sz="900" dirty="0">
+                <a:solidFill>
+                  <a:srgbClr val="5C6773"/>
+                </a:solidFill>
+                <a:latin typeface="Calibri" pitchFamily="34" charset="0"/>
+                <a:ea typeface="Calibri" pitchFamily="34" charset="-122"/>
+                <a:cs typeface="Calibri" pitchFamily="34" charset="-120"/>
+              </a:rPr>
+              <a:t> and </a:t>
+            </a:r>
+            <a:pPr indent="0" marL="0">
+              <a:lnSpc>
+                <a:spcPct val="106000"/>
+              </a:lnSpc>
+              <a:buNone/>
+            </a:pPr>
+            <a:r>
+              <a:rPr lang="en-US" sz="900" b="1" dirty="0">
+                <a:solidFill>
+                  <a:srgbClr val="0F7A84"/>
+                </a:solidFill>
+                <a:latin typeface="Calibri" pitchFamily="34" charset="0"/>
+                <a:ea typeface="Calibri" pitchFamily="34" charset="-122"/>
+                <a:cs typeface="Calibri" pitchFamily="34" charset="-120"/>
+              </a:rPr>
+              <a:t>HuBERT</a:t>
+            </a:r>
+            <a:pPr indent="0" marL="0">
+              <a:lnSpc>
+                <a:spcPct val="106000"/>
+              </a:lnSpc>
+              <a:buNone/>
+            </a:pPr>
+            <a:r>
+              <a:rPr lang="en-US" sz="900" dirty="0">
+                <a:solidFill>
+                  <a:srgbClr val="5C6773"/>
+                </a:solidFill>
+                <a:latin typeface="Calibri" pitchFamily="34" charset="0"/>
+                <a:ea typeface="Calibri" pitchFamily="34" charset="-122"/>
+                <a:cs typeface="Calibri" pitchFamily="34" charset="-120"/>
+              </a:rPr>
+              <a:t> are both self-supervised, so no result rests on one model. </a:t>
+            </a:r>
+            <a:pPr indent="0" marL="0">
+              <a:lnSpc>
+                <a:spcPct val="106000"/>
+              </a:lnSpc>
+              <a:buNone/>
+            </a:pPr>
+            <a:r>
+              <a:rPr lang="en-US" sz="900" b="1" dirty="0">
+                <a:solidFill>
+                  <a:srgbClr val="0F7A84"/>
+                </a:solidFill>
+                <a:latin typeface="Calibri" pitchFamily="34" charset="0"/>
+                <a:ea typeface="Calibri" pitchFamily="34" charset="-122"/>
+                <a:cs typeface="Calibri" pitchFamily="34" charset="-120"/>
+              </a:rPr>
+              <a:t>Whisper</a:t>
+            </a:r>
+            <a:pPr indent="0" marL="0">
+              <a:lnSpc>
+                <a:spcPct val="106000"/>
+              </a:lnSpc>
+              <a:buNone/>
+            </a:pPr>
+            <a:r>
+              <a:rPr lang="en-US" sz="900" dirty="0">
+                <a:solidFill>
+                  <a:srgbClr val="5C6773"/>
+                </a:solidFill>
+                <a:latin typeface="Calibri" pitchFamily="34" charset="0"/>
+                <a:ea typeface="Calibri" pitchFamily="34" charset="-122"/>
+                <a:cs typeface="Calibri" pitchFamily="34" charset="-120"/>
+              </a:rPr>
+              <a:t> is the same continuous form trained to transcribe, isolating what an ASR objective costs. </a:t>
+            </a:r>
+            <a:pPr indent="0" marL="0">
+              <a:lnSpc>
+                <a:spcPct val="106000"/>
+              </a:lnSpc>
+              <a:buNone/>
+            </a:pPr>
+            <a:r>
+              <a:rPr lang="en-US" sz="900" b="1" dirty="0">
+                <a:solidFill>
+                  <a:srgbClr val="B4522F"/>
+                </a:solidFill>
+                <a:latin typeface="Calibri" pitchFamily="34" charset="0"/>
+                <a:ea typeface="Calibri" pitchFamily="34" charset="-122"/>
+                <a:cs typeface="Calibri" pitchFamily="34" charset="-120"/>
+              </a:rPr>
+              <a:t>Mimi</a:t>
+            </a:r>
+            <a:pPr indent="0" marL="0">
+              <a:lnSpc>
+                <a:spcPct val="106000"/>
+              </a:lnSpc>
+              <a:buNone/>
+            </a:pPr>
+            <a:r>
+              <a:rPr lang="en-US" sz="900" dirty="0">
+                <a:solidFill>
+                  <a:srgbClr val="5C6773"/>
+                </a:solidFill>
+                <a:latin typeface="Calibri" pitchFamily="34" charset="0"/>
+                <a:ea typeface="Calibri" pitchFamily="34" charset="-122"/>
+                <a:cs typeface="Calibri" pitchFamily="34" charset="-120"/>
+              </a:rPr>
+              <a:t> has its first codebook distilled from WavLM, so quantisation is measured against its own teacher. </a:t>
+            </a:r>
+            <a:pPr indent="0" marL="0">
+              <a:lnSpc>
+                <a:spcPct val="106000"/>
+              </a:lnSpc>
+              <a:buNone/>
+            </a:pPr>
+            <a:r>
+              <a:rPr lang="en-US" sz="900" b="1" dirty="0">
+                <a:solidFill>
+                  <a:srgbClr val="7C8896"/>
+                </a:solidFill>
+                <a:latin typeface="Calibri" pitchFamily="34" charset="0"/>
+                <a:ea typeface="Calibri" pitchFamily="34" charset="-122"/>
+                <a:cs typeface="Calibri" pitchFamily="34" charset="-120"/>
+              </a:rPr>
+              <a:t>Text</a:t>
+            </a:r>
+            <a:pPr indent="0" marL="0">
+              <a:lnSpc>
+                <a:spcPct val="106000"/>
+              </a:lnSpc>
+              <a:buNone/>
+            </a:pPr>
+            <a:r>
+              <a:rPr lang="en-US" sz="900" dirty="0">
+                <a:solidFill>
+                  <a:srgbClr val="5C6773"/>
+                </a:solidFill>
+                <a:latin typeface="Calibri" pitchFamily="34" charset="0"/>
+                <a:ea typeface="Calibri" pitchFamily="34" charset="-122"/>
+                <a:cs typeface="Calibri" pitchFamily="34" charset="-120"/>
+              </a:rPr>
+              <a:t> appears twice, as a check and as the real baseline.</a:t>
+            </a:r>
+            <a:endParaRPr lang="en-US" sz="900" dirty="0"/>
+          </a:p>
+        </p:txBody>
+      </p:sp>
+      <p:sp>
+        <p:nvSpPr>
+          <p:cNvPr id="68" name="Shape 66"/>
+          <p:cNvSpPr/>
+          <p:nvPr/>
+        </p:nvSpPr>
+        <p:spPr>
+          <a:xfrm>
+            <a:off x="457200" y="5980176"/>
             <a:ext cx="11247120" cy="640080"/>
           </a:xfrm>
           <a:prstGeom prst="roundRect">
@@ -3536,13 +3792,13 @@
       </p:sp>
       <p:sp>
         <p:nvSpPr>
-          <p:cNvPr id="67" name="Text 65"/>
-          <p:cNvSpPr/>
-          <p:nvPr/>
-        </p:nvSpPr>
-        <p:spPr>
-          <a:xfrm>
-            <a:off x="658368" y="5980176"/>
+          <p:cNvPr id="69" name="Text 67"/>
+          <p:cNvSpPr/>
+          <p:nvPr/>
+        </p:nvSpPr>
+        <p:spPr>
+          <a:xfrm>
+            <a:off x="658368" y="6071616"/>
             <a:ext cx="10881360" cy="475488"/>
           </a:xfrm>
           <a:prstGeom prst="rect">

--- a/docs/advisory_slide.pptx
+++ b/docs/advisory_slide.pptx
@@ -967,7 +967,7 @@
                 <a:ea typeface="Cambria" pitchFamily="34" charset="-122"/>
                 <a:cs typeface="Cambria" pitchFamily="34" charset="-120"/>
               </a:rPr>
-              <a:t>Deployed speech-to-speech systems never hear audio. They hear discrete tokens. Do those tokens still carry what a speaker meant?</a:t>
+              <a:t>Deployed speech-to-speech systems never hear raw audio. They hear discrete tokens. Do those tokens still retain untranscribed meaning?</a:t>
             </a:r>
             <a:endParaRPr lang="en-US" sz="1400" dirty="0"/>
           </a:p>
@@ -1338,7 +1338,7 @@
                 <a:ea typeface="Calibri" pitchFamily="34" charset="-122"/>
                 <a:cs typeface="Calibri" pitchFamily="34" charset="-120"/>
               </a:rPr>
-              <a:t>SO THIS STUDY</a:t>
+              <a:t>THIS STUDY</a:t>
             </a:r>
             <a:endParaRPr lang="en-US" sz="950" dirty="0"/>
           </a:p>
@@ -1414,8 +1414,33 @@
                 <a:ea typeface="Calibri" pitchFamily="34" charset="-122"/>
                 <a:cs typeface="Calibri" pitchFamily="34" charset="-120"/>
               </a:rPr>
-              <a:t> probing self-supervised models on sarcasm. Separately, discretisation is known to damage paralinguistic content (DASB, Mousavi et al. 2026). </a:t>
-            </a:r>
+              <a:t> probing self-supervised models on sarcasm. Separately, discretisation is known to damage paralinguistic content (DASB, Mousavi et al. 2026).</a:t>
+            </a:r>
+            <a:endParaRPr lang="en-US" sz="950" dirty="0"/>
+          </a:p>
+        </p:txBody>
+      </p:sp>
+      <p:sp>
+        <p:nvSpPr>
+          <p:cNvPr id="16" name="Text 14"/>
+          <p:cNvSpPr/>
+          <p:nvPr/>
+        </p:nvSpPr>
+        <p:spPr>
+          <a:xfrm>
+            <a:off x="4288536" y="1682496"/>
+            <a:ext cx="3575304" cy="841248"/>
+          </a:xfrm>
+          <a:prstGeom prst="rect">
+            <a:avLst/>
+          </a:prstGeom>
+          <a:noFill/>
+          <a:ln/>
+        </p:spPr>
+        <p:txBody>
+          <a:bodyPr wrap="square" lIns="0" tIns="0" rIns="0" bIns="0" rtlCol="0" anchor="ctr"/>
+          <a:lstStyle/>
+          <a:p>
             <a:pPr indent="0" marL="0">
               <a:lnSpc>
                 <a:spcPct val="108000"/>
@@ -1423,41 +1448,16 @@
               <a:buNone/>
             </a:pPr>
             <a:r>
-              <a:rPr lang="en-US" sz="950" i="1" dirty="0">
-                <a:solidFill>
-                  <a:srgbClr val="131920"/>
-                </a:solidFill>
-                <a:latin typeface="Calibri" pitchFamily="34" charset="0"/>
-                <a:ea typeface="Calibri" pitchFamily="34" charset="-122"/>
-                <a:cs typeface="Calibri" pitchFamily="34" charset="-120"/>
-              </a:rPr>
-              <a:t>Neither claim is reclaimed here.</a:t>
-            </a:r>
-            <a:endParaRPr lang="en-US" sz="950" dirty="0"/>
-          </a:p>
-        </p:txBody>
-      </p:sp>
-      <p:sp>
-        <p:nvSpPr>
-          <p:cNvPr id="16" name="Text 14"/>
-          <p:cNvSpPr/>
-          <p:nvPr/>
-        </p:nvSpPr>
-        <p:spPr>
-          <a:xfrm>
-            <a:off x="4288536" y="1682496"/>
-            <a:ext cx="3575304" cy="841248"/>
-          </a:xfrm>
-          <a:prstGeom prst="rect">
-            <a:avLst/>
-          </a:prstGeom>
-          <a:noFill/>
-          <a:ln/>
-        </p:spPr>
-        <p:txBody>
-          <a:bodyPr wrap="square" lIns="0" tIns="0" rIns="0" bIns="0" rtlCol="0" anchor="ctr"/>
-          <a:lstStyle/>
-          <a:p>
+              <a:rPr lang="en-US" sz="950" dirty="0">
+                <a:solidFill>
+                  <a:srgbClr val="5C6773"/>
+                </a:solidFill>
+                <a:latin typeface="Calibri" pitchFamily="34" charset="0"/>
+                <a:ea typeface="Calibri" pitchFamily="34" charset="-122"/>
+                <a:cs typeface="Calibri" pitchFamily="34" charset="-120"/>
+              </a:rPr>
+              <a:t>Lin et al. probed </a:t>
+            </a:r>
             <a:pPr indent="0" marL="0">
               <a:lnSpc>
                 <a:spcPct val="108000"/>
@@ -1465,15 +1465,15 @@
               <a:buNone/>
             </a:pPr>
             <a:r>
-              <a:rPr lang="en-US" sz="950" dirty="0">
-                <a:solidFill>
-                  <a:srgbClr val="5C6773"/>
-                </a:solidFill>
-                <a:latin typeface="Calibri" pitchFamily="34" charset="0"/>
-                <a:ea typeface="Calibri" pitchFamily="34" charset="-122"/>
-                <a:cs typeface="Calibri" pitchFamily="34" charset="-120"/>
-              </a:rPr>
-              <a:t>Lin et al. probed </a:t>
+              <a:rPr lang="en-US" sz="950" b="1" dirty="0">
+                <a:solidFill>
+                  <a:srgbClr val="131920"/>
+                </a:solidFill>
+                <a:latin typeface="Calibri" pitchFamily="34" charset="0"/>
+                <a:ea typeface="Calibri" pitchFamily="34" charset="-122"/>
+                <a:cs typeface="Calibri" pitchFamily="34" charset="-120"/>
+              </a:rPr>
+              <a:t>MUStARD</a:t>
             </a:r>
             <a:pPr indent="0" marL="0">
               <a:lnSpc>
@@ -1482,23 +1482,6 @@
               <a:buNone/>
             </a:pPr>
             <a:r>
-              <a:rPr lang="en-US" sz="950" b="1" dirty="0">
-                <a:solidFill>
-                  <a:srgbClr val="131920"/>
-                </a:solidFill>
-                <a:latin typeface="Calibri" pitchFamily="34" charset="0"/>
-                <a:ea typeface="Calibri" pitchFamily="34" charset="-122"/>
-                <a:cs typeface="Calibri" pitchFamily="34" charset="-120"/>
-              </a:rPr>
-              <a:t>MUStARD</a:t>
-            </a:r>
-            <a:pPr indent="0" marL="0">
-              <a:lnSpc>
-                <a:spcPct val="108000"/>
-              </a:lnSpc>
-              <a:buNone/>
-            </a:pPr>
-            <a:r>
               <a:rPr lang="en-US" sz="950" dirty="0">
                 <a:solidFill>
                   <a:srgbClr val="5C6773"/>
@@ -1507,75 +1490,7 @@
                 <a:ea typeface="Calibri" pitchFamily="34" charset="-122"/>
                 <a:cs typeface="Calibri" pitchFamily="34" charset="-120"/>
               </a:rPr>
-              <a:t>, where the utterances also differ in their words, so delivery stays confounded with word choice. That corpus is acted television speech, carries one binary sarcasm label, and no discrete tokeniser was compared. So whether tokenisation loses </a:t>
-            </a:r>
-            <a:pPr indent="0" marL="0">
-              <a:lnSpc>
-                <a:spcPct val="108000"/>
-              </a:lnSpc>
-              <a:buNone/>
-            </a:pPr>
-            <a:r>
-              <a:rPr lang="en-US" sz="950" i="1" dirty="0">
-                <a:solidFill>
-                  <a:srgbClr val="131920"/>
-                </a:solidFill>
-                <a:latin typeface="Calibri" pitchFamily="34" charset="0"/>
-                <a:ea typeface="Calibri" pitchFamily="34" charset="-122"/>
-                <a:cs typeface="Calibri" pitchFamily="34" charset="-120"/>
-              </a:rPr>
-              <a:t>meaning</a:t>
-            </a:r>
-            <a:pPr indent="0" marL="0">
-              <a:lnSpc>
-                <a:spcPct val="108000"/>
-              </a:lnSpc>
-              <a:buNone/>
-            </a:pPr>
-            <a:r>
-              <a:rPr lang="en-US" sz="950" dirty="0">
-                <a:solidFill>
-                  <a:srgbClr val="5C6773"/>
-                </a:solidFill>
-                <a:latin typeface="Calibri" pitchFamily="34" charset="0"/>
-                <a:ea typeface="Calibri" pitchFamily="34" charset="-122"/>
-                <a:cs typeface="Calibri" pitchFamily="34" charset="-120"/>
-              </a:rPr>
-              <a:t> or only </a:t>
-            </a:r>
-            <a:pPr indent="0" marL="0">
-              <a:lnSpc>
-                <a:spcPct val="108000"/>
-              </a:lnSpc>
-              <a:buNone/>
-            </a:pPr>
-            <a:r>
-              <a:rPr lang="en-US" sz="950" i="1" dirty="0">
-                <a:solidFill>
-                  <a:srgbClr val="131920"/>
-                </a:solidFill>
-                <a:latin typeface="Calibri" pitchFamily="34" charset="0"/>
-                <a:ea typeface="Calibri" pitchFamily="34" charset="-122"/>
-                <a:cs typeface="Calibri" pitchFamily="34" charset="-120"/>
-              </a:rPr>
-              <a:t>sound</a:t>
-            </a:r>
-            <a:pPr indent="0" marL="0">
-              <a:lnSpc>
-                <a:spcPct val="108000"/>
-              </a:lnSpc>
-              <a:buNone/>
-            </a:pPr>
-            <a:r>
-              <a:rPr lang="en-US" sz="950" dirty="0">
-                <a:solidFill>
-                  <a:srgbClr val="5C6773"/>
-                </a:solidFill>
-                <a:latin typeface="Calibri" pitchFamily="34" charset="0"/>
-                <a:ea typeface="Calibri" pitchFamily="34" charset="-122"/>
-                <a:cs typeface="Calibri" pitchFamily="34" charset="-120"/>
-              </a:rPr>
-              <a:t> has never been tested.</a:t>
+              <a:t>, where the utterances also differ in their words, so delivery stays confounded with word choice. That corpus is acted television speech, carries one binary sarcasm label, and no discrete tokeniser was compared.</a:t>
             </a:r>
             <a:endParaRPr lang="en-US" sz="950" dirty="0"/>
           </a:p>
@@ -2113,7 +2028,7 @@
                 <a:ea typeface="Cambria" pitchFamily="34" charset="-122"/>
                 <a:cs typeface="Cambria" pitchFamily="34" charset="-120"/>
               </a:rPr>
-              <a:t>Identical transcript. Opposite meaning.</a:t>
+              <a:t>Identical word, different meaning.</a:t>
             </a:r>
             <a:endParaRPr lang="en-US" sz="1200" dirty="0"/>
           </a:p>
@@ -3843,7 +3758,7 @@
                 <a:ea typeface="Calibri" pitchFamily="34" charset="-122"/>
                 <a:cs typeface="Calibri" pitchFamily="34" charset="-120"/>
               </a:rPr>
-              <a:t>Continuous representations preserve pragmatic stance, and it holds at matched arousal, on speakers the probe never trained on, and within each word, where WavLM reaches 0.659 against 0.534 for text. The discrete tokens deployed systems actually consume sit barely above chance.</a:t>
+              <a:t>Continuous representations preserve pragmatic stance, and holds at matched arousal and on new speakers the probe never trained on, and within each word, where WavLM reaches 0.659 against 0.534 for text. The discrete tokens consumed by deployed systems sit barely above chance.</a:t>
             </a:r>
             <a:endParaRPr lang="en-US" sz="1150" dirty="0"/>
           </a:p>

--- a/docs/advisory_slide.pptx
+++ b/docs/advisory_slide.pptx
@@ -1235,7 +1235,7 @@
                 <a:ea typeface="Calibri" pitchFamily="34" charset="-122"/>
                 <a:cs typeface="Calibri" pitchFamily="34" charset="-120"/>
               </a:rPr>
-              <a:t>LEFT UNTESTED</a:t>
+              <a:t>THE CONFOUND</a:t>
             </a:r>
             <a:endParaRPr lang="en-US" sz="950" dirty="0"/>
           </a:p>
@@ -3758,7 +3758,7 @@
                 <a:ea typeface="Calibri" pitchFamily="34" charset="-122"/>
                 <a:cs typeface="Calibri" pitchFamily="34" charset="-120"/>
               </a:rPr>
-              <a:t>Continuous representations preserve pragmatic stance, and holds at matched arousal and on new speakers the probe never trained on, and within each word, where WavLM reaches 0.659 against 0.534 for text. The discrete tokens consumed by deployed systems sit barely above chance.</a:t>
+              <a:t>Continuous representations preserve pragmatic stance, and it holds at matched arousal and on new speakers the probe never trained on, and within each word, where WavLM reaches 0.659 against 0.534 for text. The discrete tokens consumed by deployed systems sit barely above chance.</a:t>
             </a:r>
             <a:endParaRPr lang="en-US" sz="1150" dirty="0"/>
           </a:p>

--- a/docs/advisory_slide.pptx
+++ b/docs/advisory_slide.pptx
@@ -1694,7 +1694,7 @@
                 <a:ea typeface="Calibri" pitchFamily="34" charset="-122"/>
                 <a:cs typeface="Calibri" pitchFamily="34" charset="-120"/>
               </a:rPr>
-              <a:t>no tokeniser tested</a:t>
+              <a:t>continuous only</a:t>
             </a:r>
             <a:pPr indent="0" marL="0">
               <a:lnSpc>
@@ -1743,11 +1743,11 @@
         <p:spPr>
           <a:xfrm>
             <a:off x="457200" y="2578608"/>
-            <a:ext cx="3703320" cy="2724912"/>
+            <a:ext cx="3703320" cy="3310128"/>
           </a:xfrm>
           <a:prstGeom prst="roundRect">
             <a:avLst>
-              <a:gd name="adj" fmla="val 2013"/>
+              <a:gd name="adj" fmla="val 1657"/>
             </a:avLst>
           </a:prstGeom>
           <a:solidFill>
@@ -2371,7 +2371,202 @@
       </p:sp>
       <p:sp>
         <p:nvSpPr>
-          <p:cNvPr id="35" name="Text 33"/>
+          <p:cNvPr id="35" name="Shape 33"/>
+          <p:cNvSpPr/>
+          <p:nvPr/>
+        </p:nvSpPr>
+        <p:spPr>
+          <a:xfrm>
+            <a:off x="658368" y="5138928"/>
+            <a:ext cx="3300984" cy="0"/>
+          </a:xfrm>
+          <a:prstGeom prst="line">
+            <a:avLst/>
+          </a:prstGeom>
+          <a:noFill/>
+          <a:ln w="9525">
+            <a:solidFill>
+              <a:srgbClr val="DDE1E7"/>
+            </a:solidFill>
+            <a:prstDash val="solid"/>
+          </a:ln>
+        </p:spPr>
+      </p:sp>
+      <p:sp>
+        <p:nvSpPr>
+          <p:cNvPr id="36" name="Text 34"/>
+          <p:cNvSpPr/>
+          <p:nvPr/>
+        </p:nvSpPr>
+        <p:spPr>
+          <a:xfrm>
+            <a:off x="658368" y="5212080"/>
+            <a:ext cx="3300984" cy="182880"/>
+          </a:xfrm>
+          <a:prstGeom prst="rect">
+            <a:avLst/>
+          </a:prstGeom>
+          <a:noFill/>
+          <a:ln/>
+        </p:spPr>
+        <p:txBody>
+          <a:bodyPr wrap="square" lIns="0" tIns="0" rIns="0" bIns="0" rtlCol="0" anchor="ctr"/>
+          <a:lstStyle/>
+          <a:p>
+            <a:pPr indent="0" marL="0">
+              <a:buNone/>
+            </a:pPr>
+            <a:r>
+              <a:rPr lang="en-US" sz="900" b="1" spc="110" kern="0" dirty="0">
+                <a:solidFill>
+                  <a:srgbClr val="0F7A84"/>
+                </a:solidFill>
+                <a:latin typeface="Calibri" pitchFamily="34" charset="0"/>
+                <a:ea typeface="Calibri" pitchFamily="34" charset="-122"/>
+                <a:cs typeface="Calibri" pitchFamily="34" charset="-120"/>
+              </a:rPr>
+              <a:t>CONTROLS</a:t>
+            </a:r>
+            <a:endParaRPr lang="en-US" sz="900" dirty="0"/>
+          </a:p>
+        </p:txBody>
+      </p:sp>
+      <p:sp>
+        <p:nvSpPr>
+          <p:cNvPr id="37" name="Text 35"/>
+          <p:cNvSpPr/>
+          <p:nvPr/>
+        </p:nvSpPr>
+        <p:spPr>
+          <a:xfrm>
+            <a:off x="658368" y="5431536"/>
+            <a:ext cx="3300984" cy="420624"/>
+          </a:xfrm>
+          <a:prstGeom prst="rect">
+            <a:avLst/>
+          </a:prstGeom>
+          <a:noFill/>
+          <a:ln/>
+        </p:spPr>
+        <p:txBody>
+          <a:bodyPr wrap="square" lIns="0" tIns="0" rIns="0" bIns="0" rtlCol="0" anchor="ctr"/>
+          <a:lstStyle/>
+          <a:p>
+            <a:pPr indent="0" marL="0">
+              <a:lnSpc>
+                <a:spcPct val="106000"/>
+              </a:lnSpc>
+              <a:buNone/>
+            </a:pPr>
+            <a:r>
+              <a:rPr lang="en-US" sz="850" b="1" dirty="0">
+                <a:solidFill>
+                  <a:srgbClr val="131920"/>
+                </a:solidFill>
+                <a:latin typeface="Calibri" pitchFamily="34" charset="0"/>
+                <a:ea typeface="Calibri" pitchFamily="34" charset="-122"/>
+                <a:cs typeface="Calibri" pitchFamily="34" charset="-120"/>
+              </a:rPr>
+              <a:t>Arousal matched</a:t>
+            </a:r>
+            <a:pPr indent="0" marL="0">
+              <a:lnSpc>
+                <a:spcPct val="106000"/>
+              </a:lnSpc>
+              <a:buNone/>
+            </a:pPr>
+            <a:r>
+              <a:rPr lang="en-US" sz="850" dirty="0">
+                <a:solidFill>
+                  <a:srgbClr val="5C6773"/>
+                </a:solidFill>
+                <a:latin typeface="Calibri" pitchFamily="34" charset="0"/>
+                <a:ea typeface="Calibri" pitchFamily="34" charset="-122"/>
+                <a:cs typeface="Calibri" pitchFamily="34" charset="-120"/>
+              </a:rPr>
+              <a:t>, stance still decoded within each level.</a:t>
+            </a:r>
+            <a:endParaRPr lang="en-US" sz="850" dirty="0"/>
+          </a:p>
+          <a:p>
+            <a:pPr indent="0" marL="0">
+              <a:lnSpc>
+                <a:spcPct val="106000"/>
+              </a:lnSpc>
+              <a:buNone/>
+            </a:pPr>
+            <a:r>
+              <a:rPr lang="en-US" sz="850" b="1" dirty="0">
+                <a:solidFill>
+                  <a:srgbClr val="131920"/>
+                </a:solidFill>
+                <a:latin typeface="Calibri" pitchFamily="34" charset="0"/>
+                <a:ea typeface="Calibri" pitchFamily="34" charset="-122"/>
+                <a:cs typeface="Calibri" pitchFamily="34" charset="-120"/>
+              </a:rPr>
+              <a:t>Speaker held out</a:t>
+            </a:r>
+            <a:pPr indent="0" marL="0">
+              <a:lnSpc>
+                <a:spcPct val="106000"/>
+              </a:lnSpc>
+              <a:buNone/>
+            </a:pPr>
+            <a:r>
+              <a:rPr lang="en-US" sz="850" dirty="0">
+                <a:solidFill>
+                  <a:srgbClr val="5C6773"/>
+                </a:solidFill>
+                <a:latin typeface="Calibri" pitchFamily="34" charset="0"/>
+                <a:ea typeface="Calibri" pitchFamily="34" charset="-122"/>
+                <a:cs typeface="Calibri" pitchFamily="34" charset="-120"/>
+              </a:rPr>
+              <a:t>, WavLM 0.573 to 0.530 by show.</a:t>
+            </a:r>
+            <a:endParaRPr lang="en-US" sz="850" dirty="0"/>
+          </a:p>
+          <a:p>
+            <a:pPr indent="0" marL="0">
+              <a:lnSpc>
+                <a:spcPct val="106000"/>
+              </a:lnSpc>
+              <a:buNone/>
+            </a:pPr>
+            <a:r>
+              <a:rPr lang="en-US" sz="850" b="1" dirty="0">
+                <a:solidFill>
+                  <a:srgbClr val="131920"/>
+                </a:solidFill>
+                <a:latin typeface="Calibri" pitchFamily="34" charset="0"/>
+                <a:ea typeface="Calibri" pitchFamily="34" charset="-122"/>
+                <a:cs typeface="Calibri" pitchFamily="34" charset="-120"/>
+              </a:rPr>
+              <a:t>Non-independence</a:t>
+            </a:r>
+            <a:pPr indent="0" marL="0">
+              <a:lnSpc>
+                <a:spcPct val="106000"/>
+              </a:lnSpc>
+              <a:buNone/>
+            </a:pPr>
+            <a:r>
+              <a:rPr lang="en-US" sz="850" dirty="0">
+                <a:solidFill>
+                  <a:srgbClr val="5C6773"/>
+                </a:solidFill>
+                <a:latin typeface="Calibri" pitchFamily="34" charset="0"/>
+                <a:ea typeface="Calibri" pitchFamily="34" charset="-122"/>
+                <a:cs typeface="Calibri" pitchFamily="34" charset="-120"/>
+              </a:rPr>
+              <a:t>, episode folds, bootstrap, 200 permutations.</a:t>
+            </a:r>
+            <a:endParaRPr lang="en-US" sz="850" dirty="0"/>
+          </a:p>
+        </p:txBody>
+      </p:sp>
+      <p:sp>
+        <p:nvSpPr>
+          <p:cNvPr id="38" name="Text 36"/>
           <p:cNvSpPr/>
           <p:nvPr/>
         </p:nvSpPr>
@@ -2410,7 +2605,7 @@
       </p:sp>
       <p:sp>
         <p:nvSpPr>
-          <p:cNvPr id="36" name="Shape 34"/>
+          <p:cNvPr id="39" name="Shape 37"/>
           <p:cNvSpPr/>
           <p:nvPr/>
         </p:nvSpPr>
@@ -2433,7 +2628,7 @@
       </p:sp>
       <p:sp>
         <p:nvSpPr>
-          <p:cNvPr id="37" name="Text 35"/>
+          <p:cNvPr id="40" name="Text 38"/>
           <p:cNvSpPr/>
           <p:nvPr/>
         </p:nvSpPr>
@@ -2472,7 +2667,7 @@
       </p:sp>
       <p:sp>
         <p:nvSpPr>
-          <p:cNvPr id="38" name="Shape 36"/>
+          <p:cNvPr id="41" name="Shape 39"/>
           <p:cNvSpPr/>
           <p:nvPr/>
         </p:nvSpPr>
@@ -2495,7 +2690,7 @@
       </p:sp>
       <p:sp>
         <p:nvSpPr>
-          <p:cNvPr id="39" name="Text 37"/>
+          <p:cNvPr id="42" name="Text 40"/>
           <p:cNvSpPr/>
           <p:nvPr/>
         </p:nvSpPr>
@@ -2534,7 +2729,7 @@
       </p:sp>
       <p:sp>
         <p:nvSpPr>
-          <p:cNvPr id="40" name="Shape 38"/>
+          <p:cNvPr id="43" name="Shape 41"/>
           <p:cNvSpPr/>
           <p:nvPr/>
         </p:nvSpPr>
@@ -2557,7 +2752,7 @@
       </p:sp>
       <p:sp>
         <p:nvSpPr>
-          <p:cNvPr id="41" name="Text 39"/>
+          <p:cNvPr id="44" name="Text 42"/>
           <p:cNvSpPr/>
           <p:nvPr/>
         </p:nvSpPr>
@@ -2596,7 +2791,7 @@
       </p:sp>
       <p:sp>
         <p:nvSpPr>
-          <p:cNvPr id="42" name="Shape 40"/>
+          <p:cNvPr id="45" name="Shape 43"/>
           <p:cNvSpPr/>
           <p:nvPr/>
         </p:nvSpPr>
@@ -2619,7 +2814,7 @@
       </p:sp>
       <p:sp>
         <p:nvSpPr>
-          <p:cNvPr id="43" name="Text 41"/>
+          <p:cNvPr id="46" name="Text 44"/>
           <p:cNvSpPr/>
           <p:nvPr/>
         </p:nvSpPr>
@@ -2658,7 +2853,7 @@
       </p:sp>
       <p:sp>
         <p:nvSpPr>
-          <p:cNvPr id="44" name="Shape 42"/>
+          <p:cNvPr id="47" name="Shape 45"/>
           <p:cNvSpPr/>
           <p:nvPr/>
         </p:nvSpPr>
@@ -2681,7 +2876,7 @@
       </p:sp>
       <p:sp>
         <p:nvSpPr>
-          <p:cNvPr id="45" name="Text 43"/>
+          <p:cNvPr id="48" name="Text 46"/>
           <p:cNvSpPr/>
           <p:nvPr/>
         </p:nvSpPr>
@@ -2720,7 +2915,7 @@
       </p:sp>
       <p:sp>
         <p:nvSpPr>
-          <p:cNvPr id="46" name="Text 44"/>
+          <p:cNvPr id="49" name="Text 47"/>
           <p:cNvSpPr/>
           <p:nvPr/>
         </p:nvSpPr>
@@ -2759,7 +2954,7 @@
       </p:sp>
       <p:sp>
         <p:nvSpPr>
-          <p:cNvPr id="47" name="Shape 45"/>
+          <p:cNvPr id="50" name="Shape 48"/>
           <p:cNvSpPr/>
           <p:nvPr/>
         </p:nvSpPr>
@@ -2784,7 +2979,7 @@
       </p:sp>
       <p:sp>
         <p:nvSpPr>
-          <p:cNvPr id="48" name="Text 46"/>
+          <p:cNvPr id="51" name="Text 49"/>
           <p:cNvSpPr/>
           <p:nvPr/>
         </p:nvSpPr>
@@ -2823,7 +3018,7 @@
       </p:sp>
       <p:sp>
         <p:nvSpPr>
-          <p:cNvPr id="49" name="Text 47"/>
+          <p:cNvPr id="52" name="Text 50"/>
           <p:cNvSpPr/>
           <p:nvPr/>
         </p:nvSpPr>
@@ -2862,7 +3057,7 @@
       </p:sp>
       <p:sp>
         <p:nvSpPr>
-          <p:cNvPr id="50" name="Shape 48"/>
+          <p:cNvPr id="53" name="Shape 51"/>
           <p:cNvSpPr/>
           <p:nvPr/>
         </p:nvSpPr>
@@ -2887,7 +3082,7 @@
       </p:sp>
       <p:sp>
         <p:nvSpPr>
-          <p:cNvPr id="51" name="Text 49"/>
+          <p:cNvPr id="54" name="Text 52"/>
           <p:cNvSpPr/>
           <p:nvPr/>
         </p:nvSpPr>
@@ -2926,7 +3121,7 @@
       </p:sp>
       <p:sp>
         <p:nvSpPr>
-          <p:cNvPr id="52" name="Text 50"/>
+          <p:cNvPr id="55" name="Text 53"/>
           <p:cNvSpPr/>
           <p:nvPr/>
         </p:nvSpPr>
@@ -2965,7 +3160,7 @@
       </p:sp>
       <p:sp>
         <p:nvSpPr>
-          <p:cNvPr id="53" name="Shape 51"/>
+          <p:cNvPr id="56" name="Shape 54"/>
           <p:cNvSpPr/>
           <p:nvPr/>
         </p:nvSpPr>
@@ -2990,7 +3185,7 @@
       </p:sp>
       <p:sp>
         <p:nvSpPr>
-          <p:cNvPr id="54" name="Text 52"/>
+          <p:cNvPr id="57" name="Text 55"/>
           <p:cNvSpPr/>
           <p:nvPr/>
         </p:nvSpPr>
@@ -3029,7 +3224,7 @@
       </p:sp>
       <p:sp>
         <p:nvSpPr>
-          <p:cNvPr id="55" name="Text 53"/>
+          <p:cNvPr id="58" name="Text 56"/>
           <p:cNvSpPr/>
           <p:nvPr/>
         </p:nvSpPr>
@@ -3068,7 +3263,7 @@
       </p:sp>
       <p:sp>
         <p:nvSpPr>
-          <p:cNvPr id="56" name="Shape 54"/>
+          <p:cNvPr id="59" name="Shape 57"/>
           <p:cNvSpPr/>
           <p:nvPr/>
         </p:nvSpPr>
@@ -3093,7 +3288,7 @@
       </p:sp>
       <p:sp>
         <p:nvSpPr>
-          <p:cNvPr id="57" name="Text 55"/>
+          <p:cNvPr id="60" name="Text 58"/>
           <p:cNvSpPr/>
           <p:nvPr/>
         </p:nvSpPr>
@@ -3132,7 +3327,7 @@
       </p:sp>
       <p:sp>
         <p:nvSpPr>
-          <p:cNvPr id="58" name="Text 56"/>
+          <p:cNvPr id="61" name="Text 59"/>
           <p:cNvSpPr/>
           <p:nvPr/>
         </p:nvSpPr>
@@ -3171,7 +3366,7 @@
       </p:sp>
       <p:sp>
         <p:nvSpPr>
-          <p:cNvPr id="59" name="Shape 57"/>
+          <p:cNvPr id="62" name="Shape 60"/>
           <p:cNvSpPr/>
           <p:nvPr/>
         </p:nvSpPr>
@@ -3196,7 +3391,7 @@
       </p:sp>
       <p:sp>
         <p:nvSpPr>
-          <p:cNvPr id="60" name="Text 58"/>
+          <p:cNvPr id="63" name="Text 61"/>
           <p:cNvSpPr/>
           <p:nvPr/>
         </p:nvSpPr>
@@ -3235,7 +3430,7 @@
       </p:sp>
       <p:sp>
         <p:nvSpPr>
-          <p:cNvPr id="61" name="Text 59"/>
+          <p:cNvPr id="64" name="Text 62"/>
           <p:cNvSpPr/>
           <p:nvPr/>
         </p:nvSpPr>
@@ -3274,7 +3469,7 @@
       </p:sp>
       <p:sp>
         <p:nvSpPr>
-          <p:cNvPr id="62" name="Shape 60"/>
+          <p:cNvPr id="65" name="Shape 63"/>
           <p:cNvSpPr/>
           <p:nvPr/>
         </p:nvSpPr>
@@ -3299,7 +3494,7 @@
       </p:sp>
       <p:sp>
         <p:nvSpPr>
-          <p:cNvPr id="63" name="Text 61"/>
+          <p:cNvPr id="66" name="Text 64"/>
           <p:cNvSpPr/>
           <p:nvPr/>
         </p:nvSpPr>
@@ -3338,7 +3533,7 @@
       </p:sp>
       <p:sp>
         <p:nvSpPr>
-          <p:cNvPr id="64" name="Shape 62"/>
+          <p:cNvPr id="67" name="Shape 65"/>
           <p:cNvSpPr/>
           <p:nvPr/>
         </p:nvSpPr>
@@ -3365,7 +3560,7 @@
       </p:sp>
       <p:sp>
         <p:nvSpPr>
-          <p:cNvPr id="65" name="Shape 63"/>
+          <p:cNvPr id="68" name="Shape 66"/>
           <p:cNvSpPr/>
           <p:nvPr/>
         </p:nvSpPr>
@@ -3392,7 +3587,7 @@
       </p:sp>
       <p:sp>
         <p:nvSpPr>
-          <p:cNvPr id="66" name="Text 64"/>
+          <p:cNvPr id="69" name="Text 67"/>
           <p:cNvSpPr/>
           <p:nvPr/>
         </p:nvSpPr>
@@ -3451,7 +3646,7 @@
       </p:sp>
       <p:sp>
         <p:nvSpPr>
-          <p:cNvPr id="67" name="Text 65"/>
+          <p:cNvPr id="70" name="Text 68"/>
           <p:cNvSpPr/>
           <p:nvPr/>
         </p:nvSpPr>
@@ -3680,7 +3875,7 @@
       </p:sp>
       <p:sp>
         <p:nvSpPr>
-          <p:cNvPr id="68" name="Shape 66"/>
+          <p:cNvPr id="71" name="Shape 69"/>
           <p:cNvSpPr/>
           <p:nvPr/>
         </p:nvSpPr>
@@ -3707,7 +3902,7 @@
       </p:sp>
       <p:sp>
         <p:nvSpPr>
-          <p:cNvPr id="69" name="Text 67"/>
+          <p:cNvPr id="72" name="Text 70"/>
           <p:cNvSpPr/>
           <p:nvPr/>
         </p:nvSpPr>

--- a/docs/advisory_slide.pptx
+++ b/docs/advisory_slide.pptx
@@ -514,7 +514,7 @@
 Macro-F1 has no fixed chance value. A majority-class predictor scores only 0.196 here because macro-F1 gives zero to the two classes it never predicts, but our probe uses balanced class weights and spreads predictions across all three, so that is not its no-skill counterpart. The reference on the chart is the empirical permutation null, the same probe refit on shuffled labels, which sits near 0.33. Uniform and prior-matched random guessing give 0.322 and 0.333, agreeing closely.
 ROBUSTNESS
 Matched arousal. Stance is still decoded within each arousal level separately, so the probe is not simply reading loudness.
-Speaker held out. Grouping folds by show rather than episode moves WavLM only from 0.573 to 0.530, so it is not riding speaker identity.
+Unseen speakers. Folds are grouped by episode in the main analysis, but two episodes of one show share a host, so speaker identity could still leak. Grouping by show instead puts an entire show and its host either in training or in testing, never both, which forces the probe onto voices it has never heard. WavLM moves only from 0.573 to 0.530, so it is reading delivery rather than recognising who is speaking.
 Non-independence. All scores are out of fold under GroupKFold by episode, with episode-cluster bootstrap intervals and 200-permutation tests. Every representation beats chance at p at most 0.01.
 WHERE THE CONTRAST LIVES
 WavLM peaks at layer 20 of 24 and falls away above it, consistent with upper layers shedding paralinguistics. Whisper plateaus across its top third. Inside Mimi, what little survives sits in codebook 0, the WavLM-distilled stream, at 0.402. The seven acoustic refinement codebooks are at or near chance and five of them are not significant. Chapter 2 predicted the opposite, so this is reported as a corrected expectation.
@@ -2504,7 +2504,7 @@
                 <a:ea typeface="Calibri" pitchFamily="34" charset="-122"/>
                 <a:cs typeface="Calibri" pitchFamily="34" charset="-120"/>
               </a:rPr>
-              <a:t>Speaker held out</a:t>
+              <a:t>Unseen speakers</a:t>
             </a:r>
             <a:pPr indent="0" marL="0">
               <a:lnSpc>
@@ -2521,7 +2521,7 @@
                 <a:ea typeface="Calibri" pitchFamily="34" charset="-122"/>
                 <a:cs typeface="Calibri" pitchFamily="34" charset="-120"/>
               </a:rPr>
-              <a:t>, WavLM 0.573 to 0.530 by show.</a:t>
+              <a:t>, train and test never share a show, 0.573 to 0.530.</a:t>
             </a:r>
             <a:endParaRPr lang="en-US" sz="850" dirty="0"/>
           </a:p>

--- a/docs/advisory_slide.pptx
+++ b/docs/advisory_slide.pptx
@@ -2440,7 +2440,7 @@
         <p:spPr>
           <a:xfrm>
             <a:off x="658368" y="5431536"/>
-            <a:ext cx="3300984" cy="420624"/>
+            <a:ext cx="3300984" cy="475488"/>
           </a:xfrm>
           <a:prstGeom prst="rect">
             <a:avLst/>
@@ -2541,7 +2541,7 @@
                 <a:ea typeface="Calibri" pitchFamily="34" charset="-122"/>
                 <a:cs typeface="Calibri" pitchFamily="34" charset="-120"/>
               </a:rPr>
-              <a:t>Non-independence</a:t>
+              <a:t>Clustered data</a:t>
             </a:r>
             <a:pPr indent="0" marL="0">
               <a:lnSpc>
@@ -2558,7 +2558,7 @@
                 <a:ea typeface="Calibri" pitchFamily="34" charset="-122"/>
                 <a:cs typeface="Calibri" pitchFamily="34" charset="-120"/>
               </a:rPr>
-              <a:t>, episode folds, bootstrap, 200 permutations.</a:t>
+              <a:t>, folds and bootstrap by episode, 200 permutations.</a:t>
             </a:r>
             <a:endParaRPr lang="en-US" sz="850" dirty="0"/>
           </a:p>
@@ -3953,7 +3953,7 @@
                 <a:ea typeface="Calibri" pitchFamily="34" charset="-122"/>
                 <a:cs typeface="Calibri" pitchFamily="34" charset="-120"/>
               </a:rPr>
-              <a:t>Continuous representations preserve pragmatic stance, and it holds at matched arousal and on new speakers the probe never trained on, and within each word, where WavLM reaches 0.659 against 0.534 for text. The discrete tokens consumed by deployed systems sit barely above chance.</a:t>
+              <a:t>Pragmatic stance survives in continuous representations, and it survives the lexical control, where WavLM reaches 0.659 against 0.534 for text. Most of it does not survive discretisation. The tokens deployed systems consume sit barely above chance.</a:t>
             </a:r>
             <a:endParaRPr lang="en-US" sz="1150" dirty="0"/>
           </a:p>

--- a/docs/advisory_slide.pptx
+++ b/docs/advisory_slide.pptx
@@ -3953,7 +3953,7 @@
                 <a:ea typeface="Calibri" pitchFamily="34" charset="-122"/>
                 <a:cs typeface="Calibri" pitchFamily="34" charset="-120"/>
               </a:rPr>
-              <a:t>Pragmatic stance survives in continuous representations, and it survives the lexical control, where WavLM reaches 0.659 against 0.534 for text. Most of it does not survive discretisation. The tokens deployed systems consume sit barely above chance.</a:t>
+              <a:t>Pragmatic stance survives in continuous representations, it holds under every control opposite, and it survives the lexical control, where WavLM reaches 0.659 against 0.534 for text. Most of it does not survive discretisation. The tokens deployed systems consume sit barely above chance.</a:t>
             </a:r>
             <a:endParaRPr lang="en-US" sz="1150" dirty="0"/>
           </a:p>
